--- a/docs/Meridian-Overview.pptx
+++ b/docs/Meridian-Overview.pptx
@@ -1128,10 +1128,8 @@
           <a:lstStyle/>
           <a:p>
             <a:r>
-              <a:rPr lang="en-US" dirty="0"/>
-              <a:t>The audience cares that this isn't a bolt-on schema. Almost everything maps to STANDARD Salesforce — so admins, reports, and flows keep working. Person Accounts are Salesforce's native B2C customer model (one record that is both Account and Contact). We only added a handful of custom fields/objects where nothing standard fit, and it's all created by a single script with one permission set.</a:t>
-            </a:r>
-            <a:endParaRPr lang="en-US" dirty="0"/>
+              <a:t>The audience cares this isn't a bolt-on schema — and the standard-first story only gets stronger. Almost everything is STANDARD Salesforce: Product2/Pricebook, Order/OrderItem, and now a standard OrderSummary (Order Management) per order that rolls up shipping and sales tax; Person Accounts for B2C identity; Case/CaseComment for support. Even things we once kept custom are standard now — Wishlist/WishlistItem, ContactPointAddress, and Coupon/Promotion. The ONLY custom object left is Product Reviews (no standard fit), plus a few justified Order fields. One script, one permission set provisions it all.</a:t>
+            </a:r>
           </a:p>
         </p:txBody>
       </p:sp>
@@ -1304,10 +1302,8 @@
           <a:lstStyle/>
           <a:p>
             <a:r>
-              <a:rPr lang="en-US" dirty="0"/>
-              <a:t>Narrate the lifecycle. When a shopper pays, a real Order is created in Salesforce as Draft and immediately Activated (=paid). From then on, the MERCHANT drives it in Salesforce — flipping Status to Shipped, then Completed. The storefront just reads Status back, so the business runs fulfilment in the tool they already use. The three chips are the trust points: money and stock are server-side, and we take payment before we ever write the order.</a:t>
-            </a:r>
-            <a:endParaRPr lang="en-US" dirty="0"/>
+              <a:t>Narrate the lifecycle. When a shopper pays, we compute totals — including sales tax — server-side, take payment, then create a real Order in Salesforce (Draft, immediately Activated = paid) AND a standard OrderSummary that rolls up the product, shipping and tax amounts. From there the MERCHANT drives it in Salesforce — Status to Shipped, then Completed — and the storefront just reads Status back. The three chips are the trust points: money and stock are server-side, and payment is taken before the order is ever written.</a:t>
+            </a:r>
           </a:p>
         </p:txBody>
       </p:sp>
@@ -1480,10 +1476,8 @@
           <a:lstStyle/>
           <a:p>
             <a:r>
-              <a:rPr lang="en-US" dirty="0"/>
-              <a:t>Don't read every tile — scan a few and say "sixteen features, each built standard-first, each with automated tests." Point out the ones tied to Salesforce depth: live order tracking (CDC), support tickets (Case + CaseComment), reviews/wishlist/addresses (custom objects). Mention it's fully keyboard/screen-reader accessible and has SEO + a passing end-to-end test suite.</a:t>
-            </a:r>
-            <a:endParaRPr lang="en-US" dirty="0"/>
+              <a:t>Don't read every tile — scan a few and say 'sixteen features, each standard-first and each tested.' Call out the Salesforce depth: a standard OrderSummary per order (Order Management) with sales tax; live order tracking (CDC to SSE); support (Case + CaseComment); and the standard-first wins — Wishlist, saved addresses (ContactPointAddress) and promo codes (Coupon/Promotion) are all standard objects now, with Product Reviews the one custom object. Fully keyboard/screen-reader accessible, SEO, and a green end-to-end suite.</a:t>
+            </a:r>
           </a:p>
         </p:txBody>
       </p:sp>
@@ -7535,7 +7529,7 @@
                 <a:ea typeface="Arial" pitchFamily="34" charset="-122"/>
                 <a:cs typeface="Arial" pitchFamily="34" charset="-120"/>
               </a:rPr>
-              <a:t>Order + OrderItem </a:t>
+              <a:t>Order + OrderItem + OrderSummary </a:t>
             </a:r>
             <a:pPr indent="0" marL="0">
               <a:lnSpc>
@@ -7552,7 +7546,7 @@
                 <a:ea typeface="Arial" pitchFamily="34" charset="-122"/>
                 <a:cs typeface="Arial" pitchFamily="34" charset="-120"/>
               </a:rPr>
-              <a:t>— real orders &amp; lifecycle</a:t>
+              <a:t>— orders &amp; OMS</a:t>
             </a:r>
             <a:endParaRPr lang="en-US" sz="1500" dirty="0"/>
           </a:p>
@@ -7576,7 +7570,7 @@
                 <a:ea typeface="Arial" pitchFamily="34" charset="-122"/>
                 <a:cs typeface="Arial" pitchFamily="34" charset="-120"/>
               </a:rPr>
-              <a:t>Person Accounts </a:t>
+              <a:t>Person Accounts · Wishlist </a:t>
             </a:r>
             <a:pPr indent="0" marL="0">
               <a:lnSpc>
@@ -7593,7 +7587,7 @@
                 <a:ea typeface="Arial" pitchFamily="34" charset="-122"/>
                 <a:cs typeface="Arial" pitchFamily="34" charset="-120"/>
               </a:rPr>
-              <a:t>— each shopper is a B2C customer record</a:t>
+              <a:t>· ContactPointAddress</a:t>
             </a:r>
             <a:endParaRPr lang="en-US" sz="1500" dirty="0"/>
           </a:p>
@@ -7634,7 +7628,7 @@
                 <a:ea typeface="Arial" pitchFamily="34" charset="-122"/>
                 <a:cs typeface="Arial" pitchFamily="34" charset="-120"/>
               </a:rPr>
-              <a:t>— support tickets &amp; public replies</a:t>
+              <a:t>· Coupon + Promotion</a:t>
             </a:r>
             <a:endParaRPr lang="en-US" sz="1500" dirty="0"/>
           </a:p>
@@ -7719,7 +7713,7 @@
                 <a:ea typeface="Arial" pitchFamily="34" charset="-122"/>
                 <a:cs typeface="Arial" pitchFamily="34" charset="-120"/>
               </a:rPr>
-              <a:t>Order.Shopper__c </a:t>
+              <a:t>Order fields </a:t>
             </a:r>
             <a:pPr indent="0" marL="0">
               <a:lnSpc>
@@ -7736,7 +7730,7 @@
                 <a:ea typeface="Arial" pitchFamily="34" charset="-122"/>
                 <a:cs typeface="Arial" pitchFamily="34" charset="-120"/>
               </a:rPr>
-              <a:t>+ a few web-order fields</a:t>
+              <a:t>— discount, shipping, promo, tracking</a:t>
             </a:r>
             <a:endParaRPr lang="en-US" sz="1500" dirty="0"/>
           </a:p>
@@ -7760,7 +7754,7 @@
                 <a:ea typeface="Arial" pitchFamily="34" charset="-122"/>
                 <a:cs typeface="Arial" pitchFamily="34" charset="-120"/>
               </a:rPr>
-              <a:t>Reviews · Wishlist · Addresses </a:t>
+              <a:t>Product Reviews </a:t>
             </a:r>
             <a:pPr indent="0" marL="0">
               <a:lnSpc>
@@ -7777,7 +7771,7 @@
                 <a:ea typeface="Arial" pitchFamily="34" charset="-122"/>
                 <a:cs typeface="Arial" pitchFamily="34" charset="-120"/>
               </a:rPr>
-              <a:t>— small custom objects</a:t>
+              <a:t>— the one custom object left</a:t>
             </a:r>
             <a:endParaRPr lang="en-US" sz="1500" dirty="0"/>
           </a:p>
@@ -9432,7 +9426,7 @@
                 <a:ea typeface="Arial" pitchFamily="34" charset="-122"/>
                 <a:cs typeface="Arial" pitchFamily="34" charset="-120"/>
               </a:rPr>
-              <a:t>Promo + payment</a:t>
+              <a:t>Promo, tax + payment</a:t>
             </a:r>
             <a:endParaRPr lang="en-US" sz="1000" dirty="0"/>
           </a:p>
@@ -9576,7 +9570,7 @@
                 <a:ea typeface="Arial" pitchFamily="34" charset="-122"/>
                 <a:cs typeface="Arial" pitchFamily="34" charset="-120"/>
               </a:rPr>
-              <a:t>Created &amp; activated on pay</a:t>
+              <a:t>Order + OrderSummary on pay</a:t>
             </a:r>
             <a:endParaRPr lang="en-US" sz="1000" dirty="0"/>
           </a:p>
@@ -11036,7 +11030,7 @@
                           <a:ea typeface="Arial" pitchFamily="34" charset="-122"/>
                           <a:cs typeface="Arial" pitchFamily="34" charset="-120"/>
                         </a:rPr>
-                        <a:t>Stateful, resilient</a:t>
+                        <a:t>Tax + resilient</a:t>
                       </a:r>
                       <a:endParaRPr lang="en-US" sz="1200" dirty="0">
                         <a:latin typeface="Arial" charset="0"/>
@@ -11119,7 +11113,7 @@
                           <a:ea typeface="Arial" pitchFamily="34" charset="-122"/>
                           <a:cs typeface="Arial" pitchFamily="34" charset="-120"/>
                         </a:rPr>
-                        <a:t>Server-validated</a:t>
+                        <a:t>Coupon + Promotion</a:t>
                       </a:r>
                       <a:endParaRPr lang="en-US" sz="1200" dirty="0">
                         <a:latin typeface="Arial" charset="0"/>
@@ -11287,7 +11281,7 @@
                           <a:ea typeface="Arial" pitchFamily="34" charset="-122"/>
                           <a:cs typeface="Arial" pitchFamily="34" charset="-120"/>
                         </a:rPr>
-                        <a:t>Per customer</a:t>
+                        <a:t>Per customer · OMS</a:t>
                       </a:r>
                       <a:endParaRPr lang="en-US" sz="1200" dirty="0">
                         <a:latin typeface="Arial" charset="0"/>
@@ -11536,7 +11530,7 @@
                           <a:ea typeface="Arial" pitchFamily="34" charset="-122"/>
                           <a:cs typeface="Arial" pitchFamily="34" charset="-120"/>
                         </a:rPr>
-                        <a:t>Saved to the account</a:t>
+                        <a:t>Standard Wishlist object</a:t>
                       </a:r>
                       <a:endParaRPr lang="en-US" sz="1200" dirty="0">
                         <a:latin typeface="Arial" charset="0"/>
@@ -11621,7 +11615,7 @@
                           <a:ea typeface="Arial" pitchFamily="34" charset="-122"/>
                           <a:cs typeface="Arial" pitchFamily="34" charset="-120"/>
                         </a:rPr>
-                        <a:t>Default + reuse</a:t>
+                        <a:t>ContactPointAddress</a:t>
                       </a:r>
                       <a:endParaRPr lang="en-US" sz="1200" dirty="0">
                         <a:latin typeface="Arial" charset="0"/>

--- a/docs/Meridian-Overview.pptx
+++ b/docs/Meridian-Overview.pptx
@@ -4,6 +4,9 @@
   <p:sldMasterIdLst>
     <p:sldMasterId id="2147483648" r:id="rId1"/>
   </p:sldMasterIdLst>
+  <p:notesMasterIdLst>
+    <p:notesMasterId r:id="rId14"/>
+  </p:notesMasterIdLst>
   <p:sldIdLst>
     <p:sldId id="256" r:id="rId2"/>
     <p:sldId id="257" r:id="rId3"/>
@@ -18,11 +21,8 @@
     <p:sldId id="266" r:id="rId12"/>
     <p:sldId id="267" r:id="rId13"/>
   </p:sldIdLst>
-  <p:notesMasterIdLst>
-    <p:notesMasterId r:id="rId14"/>
-  </p:notesMasterIdLst>
-  <p:sldSz cx="12191695" cy="6858000"/>
-  <p:notesSz cx="6858000" cy="12191695"/>
+  <p:sldSz cx="12192000" cy="6858000"/>
+  <p:notesSz cx="6858000" cy="12192000"/>
   <p:defaultTextStyle>
     <a:lvl1pPr marL="0" algn="l" defTabSz="914400" rtl="0" eaLnBrk="1" latinLnBrk="0" hangingPunct="1">
       <a:defRPr sz="1800" kern="1200">
@@ -115,6 +115,11 @@
       </a:defRPr>
     </a:lvl9pPr>
   </p:defaultTextStyle>
+  <p:extLst>
+    <p:ext uri="{EFAFB233-063F-42B5-8137-9DF3F51BA10A}">
+      <p15:sldGuideLst xmlns:p15="http://schemas.microsoft.com/office/powerpoint/2012/main"/>
+    </p:ext>
+  </p:extLst>
 </p:presentation>
 </file>
 
@@ -140,234 +145,10 @@
           <a:chExt cx="0" cy="0"/>
         </a:xfrm>
       </p:grpSpPr>
-      <p:sp>
-        <p:nvSpPr>
-          <p:cNvPr id="2" name="Header Placeholder 1"/>
-          <p:cNvSpPr>
-            <a:spLocks noGrp="1"/>
-          </p:cNvSpPr>
-          <p:nvPr>
-            <p:ph type="hdr" sz="quarter"/>
-          </p:nvPr>
-        </p:nvSpPr>
-        <p:spPr>
-          <a:xfrm>
-            <a:off x="0" y="0"/>
-            <a:ext cx="2971800" cy="458788"/>
-          </a:xfrm>
-          <a:prstGeom prst="rect">
-            <a:avLst/>
-          </a:prstGeom>
-        </p:spPr>
-        <p:txBody>
-          <a:bodyPr vert="horz" lIns="91440" tIns="45720" rIns="91440" bIns="45720" rtlCol="0"/>
-          <a:lstStyle>
-            <a:lvl1pPr algn="l">
-              <a:defRPr sz="1200"/>
-            </a:lvl1pPr>
-          </a:lstStyle>
-          <a:p>
-            <a:endParaRPr lang="en-US"/>
-          </a:p>
-        </p:txBody>
-      </p:sp>
-      <p:sp>
-        <p:nvSpPr>
-          <p:cNvPr id="3" name="Date Placeholder 2"/>
-          <p:cNvSpPr>
-            <a:spLocks noGrp="1"/>
-          </p:cNvSpPr>
-          <p:nvPr>
-            <p:ph type="dt" idx="1"/>
-          </p:nvPr>
-        </p:nvSpPr>
-        <p:spPr>
-          <a:xfrm>
-            <a:off x="3884613" y="0"/>
-            <a:ext cx="2971800" cy="458788"/>
-          </a:xfrm>
-          <a:prstGeom prst="rect">
-            <a:avLst/>
-          </a:prstGeom>
-        </p:spPr>
-        <p:txBody>
-          <a:bodyPr vert="horz" lIns="91440" tIns="45720" rIns="91440" bIns="45720" rtlCol="0"/>
-          <a:lstStyle>
-            <a:lvl1pPr algn="r">
-              <a:defRPr sz="1200"/>
-            </a:lvl1pPr>
-          </a:lstStyle>
-          <a:p>
-            <a:fld id="{5282F153-3F37-0F45-9E97-73ACFA13230C}" type="datetimeFigureOut">
-              <a:rPr lang="en-US"/>
-              <a:t>7/23/19</a:t>
-            </a:fld>
-            <a:endParaRPr lang="en-US"/>
-          </a:p>
-        </p:txBody>
-      </p:sp>
-      <p:sp>
-        <p:nvSpPr>
-          <p:cNvPr id="4" name="Slide Image Placeholder 3"/>
-          <p:cNvSpPr>
-            <a:spLocks noGrp="1" noRot="1" noChangeAspect="1"/>
-          </p:cNvSpPr>
-          <p:nvPr>
-            <p:ph type="sldImg" idx="2"/>
-          </p:nvPr>
-        </p:nvSpPr>
-        <p:spPr>
-          <a:xfrm>
-            <a:off x="685800" y="1143000"/>
-            <a:ext cx="5486400" cy="3086100"/>
-          </a:xfrm>
-          <a:prstGeom prst="rect">
-            <a:avLst/>
-          </a:prstGeom>
-          <a:noFill/>
-          <a:ln w="12700">
-            <a:solidFill>
-              <a:prstClr val="black"/>
-            </a:solidFill>
-          </a:ln>
-        </p:spPr>
-        <p:txBody>
-          <a:bodyPr vert="horz" lIns="91440" tIns="45720" rIns="91440" bIns="45720" rtlCol="0" anchor="ctr"/>
-          <a:lstStyle/>
-          <a:p>
-            <a:endParaRPr lang="en-US"/>
-          </a:p>
-        </p:txBody>
-      </p:sp>
-      <p:sp>
-        <p:nvSpPr>
-          <p:cNvPr id="5" name="Notes Placeholder 4"/>
-          <p:cNvSpPr>
-            <a:spLocks noGrp="1"/>
-          </p:cNvSpPr>
-          <p:nvPr>
-            <p:ph type="body" sz="quarter" idx="3"/>
-          </p:nvPr>
-        </p:nvSpPr>
-        <p:spPr>
-          <a:xfrm>
-            <a:off x="685800" y="4400550"/>
-            <a:ext cx="5486400" cy="3600450"/>
-          </a:xfrm>
-          <a:prstGeom prst="rect">
-            <a:avLst/>
-          </a:prstGeom>
-        </p:spPr>
-        <p:txBody>
-          <a:bodyPr vert="horz" lIns="91440" tIns="45720" rIns="91440" bIns="45720" rtlCol="0"/>
-          <a:lstStyle/>
-          <a:p>
-            <a:pPr lvl="0"/>
-            <a:r>
-              <a:rPr lang="en-US"/>
-              <a:t>Click to edit Master text styles</a:t>
-            </a:r>
-          </a:p>
-          <a:p>
-            <a:pPr lvl="1"/>
-            <a:r>
-              <a:rPr lang="en-US"/>
-              <a:t>Second level</a:t>
-            </a:r>
-          </a:p>
-          <a:p>
-            <a:pPr lvl="2"/>
-            <a:r>
-              <a:rPr lang="en-US"/>
-              <a:t>Third level</a:t>
-            </a:r>
-          </a:p>
-          <a:p>
-            <a:pPr lvl="3"/>
-            <a:r>
-              <a:rPr lang="en-US"/>
-              <a:t>Fourth level</a:t>
-            </a:r>
-          </a:p>
-          <a:p>
-            <a:pPr lvl="4"/>
-            <a:r>
-              <a:rPr lang="en-US"/>
-              <a:t>Fifth level</a:t>
-            </a:r>
-          </a:p>
-        </p:txBody>
-      </p:sp>
-      <p:sp>
-        <p:nvSpPr>
-          <p:cNvPr id="6" name="Footer Placeholder 5"/>
-          <p:cNvSpPr>
-            <a:spLocks noGrp="1"/>
-          </p:cNvSpPr>
-          <p:nvPr>
-            <p:ph type="ftr" sz="quarter" idx="4"/>
-          </p:nvPr>
-        </p:nvSpPr>
-        <p:spPr>
-          <a:xfrm>
-            <a:off x="0" y="8685213"/>
-            <a:ext cx="2971800" cy="458787"/>
-          </a:xfrm>
-          <a:prstGeom prst="rect">
-            <a:avLst/>
-          </a:prstGeom>
-        </p:spPr>
-        <p:txBody>
-          <a:bodyPr vert="horz" lIns="91440" tIns="45720" rIns="91440" bIns="45720" rtlCol="0" anchor="b"/>
-          <a:lstStyle>
-            <a:lvl1pPr algn="l">
-              <a:defRPr sz="1200"/>
-            </a:lvl1pPr>
-          </a:lstStyle>
-          <a:p>
-            <a:endParaRPr lang="en-US"/>
-          </a:p>
-        </p:txBody>
-      </p:sp>
-      <p:sp>
-        <p:nvSpPr>
-          <p:cNvPr id="7" name="Slide Number Placeholder 6"/>
-          <p:cNvSpPr>
-            <a:spLocks noGrp="1"/>
-          </p:cNvSpPr>
-          <p:nvPr>
-            <p:ph type="sldNum" sz="quarter" idx="5"/>
-          </p:nvPr>
-        </p:nvSpPr>
-        <p:spPr>
-          <a:xfrm>
-            <a:off x="3884613" y="8685213"/>
-            <a:ext cx="2971800" cy="458787"/>
-          </a:xfrm>
-          <a:prstGeom prst="rect">
-            <a:avLst/>
-          </a:prstGeom>
-        </p:spPr>
-        <p:txBody>
-          <a:bodyPr vert="horz" lIns="91440" tIns="45720" rIns="91440" bIns="45720" rtlCol="0" anchor="b"/>
-          <a:lstStyle>
-            <a:lvl1pPr algn="r">
-              <a:defRPr sz="1200"/>
-            </a:lvl1pPr>
-          </a:lstStyle>
-          <a:p>
-            <a:fld id="{CE5E9CC1-C706-0F49-92D6-E571CC5EEA8F}" type="slidenum">
-              <a:rPr lang="en-US"/>
-              <a:t>‹#›</a:t>
-            </a:fld>
-            <a:endParaRPr lang="en-US"/>
-          </a:p>
-        </p:txBody>
-      </p:sp>
     </p:spTree>
     <p:extLst>
       <p:ext uri="{BB962C8B-B14F-4D97-AF65-F5344CB8AC3E}">
-        <p14:creationId xmlns:p14="http://schemas.microsoft.com/office/powerpoint/2010/main" val="1024086991"/>
+        <p14:creationId xmlns:p14="http://schemas.microsoft.com/office/powerpoint/2010/main" val="2718199742"/>
       </p:ext>
     </p:extLst>
   </p:cSld>
@@ -515,7 +296,6 @@
               <a:rPr lang="en-US" dirty="0"/>
               <a:t>Opening. "This is Meridian — a working storefront we built on top of Salesforce, using Claude. The point of the demo is the PATTERN, not the coffee: Salesforce stays the system of record, the storefront is a fast modern web app, and a thin middleware connects them securely. Everything you'll see was built and verified against a real Salesforce org." Keep it to ~30 seconds, then move on.</a:t>
             </a:r>
-            <a:endParaRPr lang="en-US" dirty="0"/>
           </a:p>
         </p:txBody>
       </p:sp>
@@ -603,7 +383,6 @@
               <a:rPr lang="en-US" dirty="0"/>
               <a:t>This reframes "AI-built" from a risk into a strength. The workflow has guardrails a senior engineer would recognise: plans are approved up front, everything is verified against a REAL Salesforce org (not mocked-and-hoped), and nothing is committed unless tests, lint and build pass. The result is speed WITH an audit trail — plans, tests, docs and one clean commit per feature.</a:t>
             </a:r>
-            <a:endParaRPr lang="en-US" dirty="0"/>
           </a:p>
         </p:txBody>
       </p:sp>
@@ -691,7 +470,6 @@
               <a:rPr lang="en-US" dirty="0"/>
               <a:t>This is the stakeholder pitch. The value isn't "a coffee site" — it's a repeatable way to put a great experience in front of Salesforce for many scenarios (storefront, self-service portal, partner ordering, internal catalog), for B2C or B2B, without committing to Commerce Cloud on day one. And AI makes delivering it dramatically faster. Read the four tags as "front doors onto the same Salesforce back end."</a:t>
             </a:r>
-            <a:endParaRPr lang="en-US" dirty="0"/>
           </a:p>
         </p:txBody>
       </p:sp>
@@ -779,7 +557,6 @@
               <a:rPr lang="en-US" dirty="0"/>
               <a:t>Transition to the live demo (use the demo script for the click-by-click). The one moment to nail: change an order's status in Salesforce and let the audience watch the storefront update on its own. Close on "next": this is a foundation — subscriptions, generative AI when the org is entitled, more channels, and production payments are all natural next steps.</a:t>
             </a:r>
-            <a:endParaRPr lang="en-US" dirty="0"/>
           </a:p>
         </p:txBody>
       </p:sp>
@@ -867,7 +644,6 @@
               <a:rPr lang="en-US" dirty="0"/>
               <a:t>Set expectations: about 15 minutes of context, then a live demo where you can ask questions. Tell them the demo is the payoff — they'll see an order move through Salesforce and update the storefront in real time.</a:t>
             </a:r>
-            <a:endParaRPr lang="en-US" dirty="0"/>
           </a:p>
         </p:txBody>
       </p:sp>
@@ -955,7 +731,6 @@
               <a:rPr lang="en-US" dirty="0"/>
               <a:t>Explain "headless/decoupled" in plain words: normally people think Salesforce commerce = Commerce Cloud. This shows you don't need that to start — you keep Salesforce as the brain, and put a best-of-breed experience in front of it. Meridian (a single-origin coffee DTC store) is just our reference build to make it concrete.</a:t>
             </a:r>
-            <a:endParaRPr lang="en-US" dirty="0"/>
           </a:p>
         </p:txBody>
       </p:sp>
@@ -1043,7 +818,6 @@
               <a:rPr lang="en-US" dirty="0"/>
               <a:t>Walk left to right. Browser: the UI, no secrets, one data module. Middleware (the "BFF" — backend-for-frontend): the only thing that knows the Salesforce credentials; it validates and computes money server-side so the client can't be trusted with prices. Salesforce: the Connected App uses OAuth Client Credentials — a server-to-server login, no user password. Key line: the same code runs fully offline in "mock" mode, so we can develop and demo without a live org, and flip one switch to go live.</a:t>
             </a:r>
-            <a:endParaRPr lang="en-US" dirty="0"/>
           </a:p>
         </p:txBody>
       </p:sp>
@@ -1217,7 +991,6 @@
               <a:rPr lang="en-US" dirty="0"/>
               <a:t>Stakeholders always ask about security, so lead with it. The pattern is "secure by construction": secrets never leave the server, the browser holds no tokens it can leak, and anything that involves money or trust is decided server-side against Salesforce. Call out the two customer-facing privacy guards: guest order tracking can't be brute-forced, and support ticket internal notes never reach the customer.</a:t>
             </a:r>
-            <a:endParaRPr lang="en-US" dirty="0"/>
           </a:p>
         </p:txBody>
       </p:sp>
@@ -1391,7 +1164,6 @@
               <a:rPr lang="en-US" dirty="0"/>
               <a:t>These two are the "wow" of the demo. Person Accounts: the native Salesforce B2C model — one record that is both Account and Contact — so each shopper is a first-class customer. Live tracking: we enabled Change Data Capture on Order; when a merchant changes the status in Salesforce, that event streams to the browser over SSE and the page updates in real time. You'll literally watch it happen in the demo.</a:t>
             </a:r>
-            <a:endParaRPr lang="en-US" dirty="0"/>
           </a:p>
         </p:txBody>
       </p:sp>
@@ -1550,6 +1322,11 @@
 <file path=ppt/slideMasters/slideMaster1.xml><?xml version="1.0" encoding="utf-8"?>
 <p:sldMaster xmlns:a="http://schemas.openxmlformats.org/drawingml/2006/main" xmlns:r="http://schemas.openxmlformats.org/officeDocument/2006/relationships" xmlns:p="http://schemas.openxmlformats.org/presentationml/2006/main">
   <p:cSld>
+    <p:bg>
+      <p:bgRef idx="1001">
+        <a:schemeClr val="bg1"/>
+      </p:bgRef>
+    </p:bg>
     <p:spTree>
       <p:nvGrpSpPr>
         <p:cNvPr id="1" name=""/>
@@ -1832,6 +1609,7 @@
         <a:solidFill>
           <a:srgbClr val="0E0F11"/>
         </a:solidFill>
+        <a:effectLst/>
       </p:bgPr>
     </p:bg>
     <p:spTree>
@@ -1867,6 +1645,13 @@
           </a:solidFill>
           <a:ln/>
         </p:spPr>
+        <p:txBody>
+          <a:bodyPr/>
+          <a:lstStyle/>
+          <a:p>
+            <a:endParaRPr lang="en-US"/>
+          </a:p>
+        </p:txBody>
       </p:sp>
       <p:sp>
         <p:nvSpPr>
@@ -1889,11 +1674,11 @@
           <a:bodyPr wrap="square" rtlCol="0" anchor="ctr"/>
           <a:lstStyle/>
           <a:p>
-            <a:pPr indent="0" marL="0">
+            <a:pPr marL="0" indent="0">
               <a:buNone/>
             </a:pPr>
             <a:r>
-              <a:rPr lang="en-US" sz="1200" b="1" spc="300" kern="0" dirty="0">
+              <a:rPr lang="en-US" sz="1200" b="1" kern="0" spc="300" dirty="0">
                 <a:solidFill>
                   <a:srgbClr val="86BC25"/>
                 </a:solidFill>
@@ -1928,7 +1713,7 @@
           <a:bodyPr wrap="square" rtlCol="0" anchor="ctr"/>
           <a:lstStyle/>
           <a:p>
-            <a:pPr indent="0" marL="0">
+            <a:pPr marL="0" indent="0">
               <a:buNone/>
             </a:pPr>
             <a:r>
@@ -1942,9 +1727,6 @@
               </a:rPr>
               <a:t>Meridian</a:t>
             </a:r>
-            <a:pPr indent="0" marL="0">
-              <a:buNone/>
-            </a:pPr>
             <a:r>
               <a:rPr lang="en-US" sz="8400" b="1" dirty="0">
                 <a:solidFill>
@@ -1981,7 +1763,7 @@
           <a:bodyPr wrap="square" rtlCol="0" anchor="t"/>
           <a:lstStyle/>
           <a:p>
-            <a:pPr indent="0" marL="0">
+            <a:pPr marL="0" indent="0">
               <a:lnSpc>
                 <a:spcPct val="120000"/>
               </a:lnSpc>
@@ -1998,12 +1780,6 @@
               </a:rPr>
               <a:t>A modern storefront with </a:t>
             </a:r>
-            <a:pPr indent="0" marL="0">
-              <a:lnSpc>
-                <a:spcPct val="120000"/>
-              </a:lnSpc>
-              <a:buNone/>
-            </a:pPr>
             <a:r>
               <a:rPr lang="en-US" sz="2200" b="1" dirty="0">
                 <a:solidFill>
@@ -2015,12 +1791,6 @@
               </a:rPr>
               <a:t>Salesforce as the system of record</a:t>
             </a:r>
-            <a:pPr indent="0" marL="0">
-              <a:lnSpc>
-                <a:spcPct val="120000"/>
-              </a:lnSpc>
-              <a:buNone/>
-            </a:pPr>
             <a:r>
               <a:rPr lang="en-US" sz="2200" dirty="0">
                 <a:solidFill>
@@ -2057,7 +1827,7 @@
           <a:bodyPr wrap="square" rtlCol="0" anchor="ctr"/>
           <a:lstStyle/>
           <a:p>
-            <a:pPr indent="0" marL="0">
+            <a:pPr marL="0" indent="0">
               <a:buNone/>
             </a:pPr>
             <a:r>
@@ -2097,6 +1867,13 @@
             <a:prstDash val="solid"/>
           </a:ln>
         </p:spPr>
+        <p:txBody>
+          <a:bodyPr/>
+          <a:lstStyle/>
+          <a:p>
+            <a:endParaRPr lang="en-US"/>
+          </a:p>
+        </p:txBody>
       </p:sp>
       <p:sp>
         <p:nvSpPr>
@@ -2119,7 +1896,7 @@
           <a:bodyPr wrap="square" rtlCol="0" anchor="ctr"/>
           <a:lstStyle/>
           <a:p>
-            <a:pPr algn="r" indent="0" marL="0">
+            <a:pPr marL="0" indent="0">
               <a:buNone/>
             </a:pPr>
             <a:r>
@@ -2133,9 +1910,6 @@
               </a:rPr>
               <a:t>Deloitte</a:t>
             </a:r>
-            <a:pPr algn="r" indent="0" marL="0">
-              <a:buNone/>
-            </a:pPr>
             <a:r>
               <a:rPr lang="en-US" sz="2200" b="1" dirty="0">
                 <a:solidFill>
@@ -2172,7 +1946,7 @@
           <a:bodyPr wrap="square" rtlCol="0" anchor="ctr"/>
           <a:lstStyle/>
           <a:p>
-            <a:pPr algn="r" indent="0" marL="0">
+            <a:pPr marL="0" indent="0" algn="r">
               <a:lnSpc>
                 <a:spcPct val="120000"/>
               </a:lnSpc>
@@ -2192,7 +1966,7 @@
             <a:endParaRPr lang="en-US" sz="1100" dirty="0"/>
           </a:p>
           <a:p>
-            <a:pPr algn="r" indent="0" marL="0">
+            <a:pPr marL="0" indent="0" algn="r">
               <a:lnSpc>
                 <a:spcPct val="120000"/>
               </a:lnSpc>
@@ -2229,6 +2003,7 @@
         <a:solidFill>
           <a:srgbClr val="0E0F11"/>
         </a:solidFill>
+        <a:effectLst/>
       </p:bgPr>
     </p:bg>
     <p:spTree>
@@ -2266,11 +2041,11 @@
           <a:bodyPr wrap="square" rtlCol="0" anchor="ctr"/>
           <a:lstStyle/>
           <a:p>
-            <a:pPr indent="0" marL="0">
+            <a:pPr marL="0" indent="0">
               <a:buNone/>
             </a:pPr>
             <a:r>
-              <a:rPr lang="en-US" sz="1100" b="1" spc="300" kern="0" dirty="0">
+              <a:rPr lang="en-US" sz="1100" b="1" kern="0" spc="300" dirty="0">
                 <a:solidFill>
                   <a:srgbClr val="86BC25"/>
                 </a:solidFill>
@@ -2305,7 +2080,7 @@
           <a:bodyPr wrap="square" rtlCol="0" anchor="ctr"/>
           <a:lstStyle/>
           <a:p>
-            <a:pPr algn="r" indent="0" marL="0">
+            <a:pPr marL="0" indent="0" algn="r">
               <a:buNone/>
             </a:pPr>
             <a:r>
@@ -2319,9 +2094,6 @@
               </a:rPr>
               <a:t>Deloitte</a:t>
             </a:r>
-            <a:pPr algn="r" indent="0" marL="0">
-              <a:buNone/>
-            </a:pPr>
             <a:r>
               <a:rPr lang="en-US" sz="1500" b="1" dirty="0">
                 <a:solidFill>
@@ -2359,6 +2131,13 @@
             <a:prstDash val="solid"/>
           </a:ln>
         </p:spPr>
+        <p:txBody>
+          <a:bodyPr/>
+          <a:lstStyle/>
+          <a:p>
+            <a:endParaRPr lang="en-US"/>
+          </a:p>
+        </p:txBody>
       </p:sp>
       <p:sp>
         <p:nvSpPr>
@@ -2381,7 +2160,7 @@
           <a:bodyPr wrap="square" rtlCol="0" anchor="t"/>
           <a:lstStyle/>
           <a:p>
-            <a:pPr algn="l" indent="0" marL="0">
+            <a:pPr marL="0" indent="0" algn="l">
               <a:buNone/>
             </a:pPr>
             <a:r>
@@ -2421,6 +2200,13 @@
             <a:prstDash val="solid"/>
           </a:ln>
         </p:spPr>
+        <p:txBody>
+          <a:bodyPr/>
+          <a:lstStyle/>
+          <a:p>
+            <a:endParaRPr lang="en-US"/>
+          </a:p>
+        </p:txBody>
       </p:sp>
       <p:sp>
         <p:nvSpPr>
@@ -2443,11 +2229,11 @@
           <a:bodyPr wrap="square" rtlCol="0" anchor="ctr"/>
           <a:lstStyle/>
           <a:p>
-            <a:pPr indent="0" marL="0">
+            <a:pPr marL="0" indent="0">
               <a:buNone/>
             </a:pPr>
             <a:r>
-              <a:rPr lang="en-US" sz="950" spc="100" kern="0" dirty="0">
+              <a:rPr lang="en-US" sz="950" kern="0" spc="100" dirty="0">
                 <a:solidFill>
                   <a:srgbClr val="8E948B"/>
                 </a:solidFill>
@@ -2482,7 +2268,7 @@
           <a:bodyPr wrap="square" rtlCol="0" anchor="ctr"/>
           <a:lstStyle/>
           <a:p>
-            <a:pPr algn="r" indent="0" marL="0">
+            <a:pPr marL="0" indent="0" algn="r">
               <a:buNone/>
             </a:pPr>
             <a:r>
@@ -2519,6 +2305,13 @@
           </a:solidFill>
           <a:ln/>
         </p:spPr>
+        <p:txBody>
+          <a:bodyPr/>
+          <a:lstStyle/>
+          <a:p>
+            <a:endParaRPr lang="en-US"/>
+          </a:p>
+        </p:txBody>
       </p:sp>
       <p:sp>
         <p:nvSpPr>
@@ -2562,12 +2355,6 @@
               </a:rPr>
               <a:t>Plan first. </a:t>
             </a:r>
-            <a:pPr indent="0" marL="0">
-              <a:lnSpc>
-                <a:spcPct val="112000"/>
-              </a:lnSpc>
-              <a:buNone/>
-            </a:pPr>
             <a:r>
               <a:rPr lang="en-US" sz="1500" dirty="0">
                 <a:solidFill>
@@ -2603,12 +2390,6 @@
               </a:rPr>
               <a:t>Build the full stack. </a:t>
             </a:r>
-            <a:pPr indent="0" marL="0">
-              <a:lnSpc>
-                <a:spcPct val="112000"/>
-              </a:lnSpc>
-              <a:buNone/>
-            </a:pPr>
             <a:r>
               <a:rPr lang="en-US" sz="1500" dirty="0">
                 <a:solidFill>
@@ -2644,12 +2425,6 @@
               </a:rPr>
               <a:t>Verify against a real org. </a:t>
             </a:r>
-            <a:pPr indent="0" marL="0">
-              <a:lnSpc>
-                <a:spcPct val="112000"/>
-              </a:lnSpc>
-              <a:buNone/>
-            </a:pPr>
             <a:r>
               <a:rPr lang="en-US" sz="1500" dirty="0">
                 <a:solidFill>
@@ -2685,12 +2460,6 @@
               </a:rPr>
               <a:t>Quality gates. </a:t>
             </a:r>
-            <a:pPr indent="0" marL="0">
-              <a:lnSpc>
-                <a:spcPct val="112000"/>
-              </a:lnSpc>
-              <a:buNone/>
-            </a:pPr>
             <a:r>
               <a:rPr lang="en-US" sz="1500" dirty="0">
                 <a:solidFill>
@@ -2726,12 +2495,6 @@
               </a:rPr>
               <a:t>Docs stay in sync, </a:t>
             </a:r>
-            <a:pPr indent="0" marL="0">
-              <a:lnSpc>
-                <a:spcPct val="112000"/>
-              </a:lnSpc>
-              <a:buNone/>
-            </a:pPr>
             <a:r>
               <a:rPr lang="en-US" sz="1500" dirty="0">
                 <a:solidFill>
@@ -2769,6 +2532,13 @@
             <a:prstDash val="solid"/>
           </a:ln>
         </p:spPr>
+        <p:txBody>
+          <a:bodyPr/>
+          <a:lstStyle/>
+          <a:p>
+            <a:endParaRPr lang="en-US"/>
+          </a:p>
+        </p:txBody>
       </p:sp>
       <p:sp>
         <p:nvSpPr>
@@ -2791,7 +2561,7 @@
           <a:bodyPr wrap="square" rtlCol="0" anchor="t"/>
           <a:lstStyle/>
           <a:p>
-            <a:pPr indent="0" marL="0">
+            <a:pPr marL="0" indent="0">
               <a:lnSpc>
                 <a:spcPct val="110000"/>
               </a:lnSpc>
@@ -2809,12 +2579,6 @@
               <a:t>Full-stack
 </a:t>
             </a:r>
-            <a:pPr indent="0" marL="0">
-              <a:lnSpc>
-                <a:spcPct val="110000"/>
-              </a:lnSpc>
-              <a:buNone/>
-            </a:pPr>
             <a:r>
               <a:rPr lang="en-US" sz="1050" dirty="0">
                 <a:solidFill>
@@ -2852,6 +2616,13 @@
             <a:prstDash val="solid"/>
           </a:ln>
         </p:spPr>
+        <p:txBody>
+          <a:bodyPr/>
+          <a:lstStyle/>
+          <a:p>
+            <a:endParaRPr lang="en-US"/>
+          </a:p>
+        </p:txBody>
       </p:sp>
       <p:sp>
         <p:nvSpPr>
@@ -2874,7 +2645,7 @@
           <a:bodyPr wrap="square" rtlCol="0" anchor="t"/>
           <a:lstStyle/>
           <a:p>
-            <a:pPr indent="0" marL="0">
+            <a:pPr marL="0" indent="0">
               <a:lnSpc>
                 <a:spcPct val="110000"/>
               </a:lnSpc>
@@ -2892,12 +2663,6 @@
               <a:t>Live-verified
 </a:t>
             </a:r>
-            <a:pPr indent="0" marL="0">
-              <a:lnSpc>
-                <a:spcPct val="110000"/>
-              </a:lnSpc>
-              <a:buNone/>
-            </a:pPr>
             <a:r>
               <a:rPr lang="en-US" sz="1050" dirty="0">
                 <a:solidFill>
@@ -2935,6 +2700,13 @@
             <a:prstDash val="solid"/>
           </a:ln>
         </p:spPr>
+        <p:txBody>
+          <a:bodyPr/>
+          <a:lstStyle/>
+          <a:p>
+            <a:endParaRPr lang="en-US"/>
+          </a:p>
+        </p:txBody>
       </p:sp>
       <p:sp>
         <p:nvSpPr>
@@ -2957,7 +2729,7 @@
           <a:bodyPr wrap="square" rtlCol="0" anchor="t"/>
           <a:lstStyle/>
           <a:p>
-            <a:pPr indent="0" marL="0">
+            <a:pPr marL="0" indent="0">
               <a:lnSpc>
                 <a:spcPct val="110000"/>
               </a:lnSpc>
@@ -2975,12 +2747,6 @@
               <a:t>Days, not months
 </a:t>
             </a:r>
-            <a:pPr indent="0" marL="0">
-              <a:lnSpc>
-                <a:spcPct val="110000"/>
-              </a:lnSpc>
-              <a:buNone/>
-            </a:pPr>
             <a:r>
               <a:rPr lang="en-US" sz="1050" dirty="0">
                 <a:solidFill>
@@ -3012,6 +2778,7 @@
         <a:solidFill>
           <a:srgbClr val="0E0F11"/>
         </a:solidFill>
+        <a:effectLst/>
       </p:bgPr>
     </p:bg>
     <p:spTree>
@@ -3049,11 +2816,11 @@
           <a:bodyPr wrap="square" rtlCol="0" anchor="ctr"/>
           <a:lstStyle/>
           <a:p>
-            <a:pPr indent="0" marL="0">
+            <a:pPr marL="0" indent="0">
               <a:buNone/>
             </a:pPr>
             <a:r>
-              <a:rPr lang="en-US" sz="1100" b="1" spc="300" kern="0" dirty="0">
+              <a:rPr lang="en-US" sz="1100" b="1" kern="0" spc="300" dirty="0">
                 <a:solidFill>
                   <a:srgbClr val="86BC25"/>
                 </a:solidFill>
@@ -3088,7 +2855,7 @@
           <a:bodyPr wrap="square" rtlCol="0" anchor="ctr"/>
           <a:lstStyle/>
           <a:p>
-            <a:pPr algn="r" indent="0" marL="0">
+            <a:pPr marL="0" indent="0" algn="r">
               <a:buNone/>
             </a:pPr>
             <a:r>
@@ -3102,9 +2869,6 @@
               </a:rPr>
               <a:t>Deloitte</a:t>
             </a:r>
-            <a:pPr algn="r" indent="0" marL="0">
-              <a:buNone/>
-            </a:pPr>
             <a:r>
               <a:rPr lang="en-US" sz="1500" b="1" dirty="0">
                 <a:solidFill>
@@ -3142,6 +2906,13 @@
             <a:prstDash val="solid"/>
           </a:ln>
         </p:spPr>
+        <p:txBody>
+          <a:bodyPr/>
+          <a:lstStyle/>
+          <a:p>
+            <a:endParaRPr lang="en-US"/>
+          </a:p>
+        </p:txBody>
       </p:sp>
       <p:sp>
         <p:nvSpPr>
@@ -3164,7 +2935,7 @@
           <a:bodyPr wrap="square" rtlCol="0" anchor="t"/>
           <a:lstStyle/>
           <a:p>
-            <a:pPr algn="l" indent="0" marL="0">
+            <a:pPr marL="0" indent="0" algn="l">
               <a:buNone/>
             </a:pPr>
             <a:r>
@@ -3204,6 +2975,13 @@
             <a:prstDash val="solid"/>
           </a:ln>
         </p:spPr>
+        <p:txBody>
+          <a:bodyPr/>
+          <a:lstStyle/>
+          <a:p>
+            <a:endParaRPr lang="en-US"/>
+          </a:p>
+        </p:txBody>
       </p:sp>
       <p:sp>
         <p:nvSpPr>
@@ -3226,11 +3004,11 @@
           <a:bodyPr wrap="square" rtlCol="0" anchor="ctr"/>
           <a:lstStyle/>
           <a:p>
-            <a:pPr indent="0" marL="0">
+            <a:pPr marL="0" indent="0">
               <a:buNone/>
             </a:pPr>
             <a:r>
-              <a:rPr lang="en-US" sz="950" spc="100" kern="0" dirty="0">
+              <a:rPr lang="en-US" sz="950" kern="0" spc="100" dirty="0">
                 <a:solidFill>
                   <a:srgbClr val="8E948B"/>
                 </a:solidFill>
@@ -3265,7 +3043,7 @@
           <a:bodyPr wrap="square" rtlCol="0" anchor="ctr"/>
           <a:lstStyle/>
           <a:p>
-            <a:pPr algn="r" indent="0" marL="0">
+            <a:pPr marL="0" indent="0" algn="r">
               <a:buNone/>
             </a:pPr>
             <a:r>
@@ -3302,6 +3080,13 @@
           </a:solidFill>
           <a:ln/>
         </p:spPr>
+        <p:txBody>
+          <a:bodyPr/>
+          <a:lstStyle/>
+          <a:p>
+            <a:endParaRPr lang="en-US"/>
+          </a:p>
+        </p:txBody>
       </p:sp>
       <p:sp>
         <p:nvSpPr>
@@ -3345,12 +3130,6 @@
               </a:rPr>
               <a:t>A modern, fast, on-brand experience </a:t>
             </a:r>
-            <a:pPr indent="0" marL="0">
-              <a:lnSpc>
-                <a:spcPct val="112000"/>
-              </a:lnSpc>
-              <a:buNone/>
-            </a:pPr>
             <a:r>
               <a:rPr lang="en-US" sz="1550" dirty="0">
                 <a:solidFill>
@@ -3386,12 +3165,6 @@
               </a:rPr>
               <a:t>Salesforce stays the single source of truth </a:t>
             </a:r>
-            <a:pPr indent="0" marL="0">
-              <a:lnSpc>
-                <a:spcPct val="112000"/>
-              </a:lnSpc>
-              <a:buNone/>
-            </a:pPr>
             <a:r>
               <a:rPr lang="en-US" sz="1550" dirty="0">
                 <a:solidFill>
@@ -3427,12 +3200,6 @@
               </a:rPr>
               <a:t>B2C or B2B </a:t>
             </a:r>
-            <a:pPr indent="0" marL="0">
-              <a:lnSpc>
-                <a:spcPct val="112000"/>
-              </a:lnSpc>
-              <a:buNone/>
-            </a:pPr>
             <a:r>
               <a:rPr lang="en-US" sz="1550" dirty="0">
                 <a:solidFill>
@@ -3468,12 +3235,6 @@
               </a:rPr>
               <a:t>AI-accelerated </a:t>
             </a:r>
-            <a:pPr indent="0" marL="0">
-              <a:lnSpc>
-                <a:spcPct val="112000"/>
-              </a:lnSpc>
-              <a:buNone/>
-            </a:pPr>
             <a:r>
               <a:rPr lang="en-US" sz="1550" dirty="0">
                 <a:solidFill>
@@ -3515,6 +3276,13 @@
             <a:prstDash val="solid"/>
           </a:ln>
         </p:spPr>
+        <p:txBody>
+          <a:bodyPr/>
+          <a:lstStyle/>
+          <a:p>
+            <a:endParaRPr lang="en-US"/>
+          </a:p>
+        </p:txBody>
       </p:sp>
       <p:sp>
         <p:nvSpPr>
@@ -3537,7 +3305,7 @@
           <a:bodyPr wrap="square" rtlCol="0" anchor="ctr"/>
           <a:lstStyle/>
           <a:p>
-            <a:pPr algn="ctr" indent="0" marL="0">
+            <a:pPr marL="0" indent="0" algn="ctr">
               <a:buNone/>
             </a:pPr>
             <a:r>
@@ -3581,6 +3349,13 @@
             <a:prstDash val="solid"/>
           </a:ln>
         </p:spPr>
+        <p:txBody>
+          <a:bodyPr/>
+          <a:lstStyle/>
+          <a:p>
+            <a:endParaRPr lang="en-US"/>
+          </a:p>
+        </p:txBody>
       </p:sp>
       <p:sp>
         <p:nvSpPr>
@@ -3603,7 +3378,7 @@
           <a:bodyPr wrap="square" rtlCol="0" anchor="ctr"/>
           <a:lstStyle/>
           <a:p>
-            <a:pPr algn="ctr" indent="0" marL="0">
+            <a:pPr marL="0" indent="0" algn="ctr">
               <a:buNone/>
             </a:pPr>
             <a:r>
@@ -3647,6 +3422,13 @@
             <a:prstDash val="solid"/>
           </a:ln>
         </p:spPr>
+        <p:txBody>
+          <a:bodyPr/>
+          <a:lstStyle/>
+          <a:p>
+            <a:endParaRPr lang="en-US"/>
+          </a:p>
+        </p:txBody>
       </p:sp>
       <p:sp>
         <p:nvSpPr>
@@ -3669,7 +3451,7 @@
           <a:bodyPr wrap="square" rtlCol="0" anchor="ctr"/>
           <a:lstStyle/>
           <a:p>
-            <a:pPr algn="ctr" indent="0" marL="0">
+            <a:pPr marL="0" indent="0" algn="ctr">
               <a:buNone/>
             </a:pPr>
             <a:r>
@@ -3713,6 +3495,13 @@
             <a:prstDash val="solid"/>
           </a:ln>
         </p:spPr>
+        <p:txBody>
+          <a:bodyPr/>
+          <a:lstStyle/>
+          <a:p>
+            <a:endParaRPr lang="en-US"/>
+          </a:p>
+        </p:txBody>
       </p:sp>
       <p:sp>
         <p:nvSpPr>
@@ -3735,7 +3524,7 @@
           <a:bodyPr wrap="square" rtlCol="0" anchor="ctr"/>
           <a:lstStyle/>
           <a:p>
-            <a:pPr algn="ctr" indent="0" marL="0">
+            <a:pPr marL="0" indent="0" algn="ctr">
               <a:buNone/>
             </a:pPr>
             <a:r>
@@ -3769,6 +3558,7 @@
         <a:solidFill>
           <a:srgbClr val="0E0F11"/>
         </a:solidFill>
+        <a:effectLst/>
       </p:bgPr>
     </p:bg>
     <p:spTree>
@@ -3806,11 +3596,11 @@
           <a:bodyPr wrap="square" rtlCol="0" anchor="ctr"/>
           <a:lstStyle/>
           <a:p>
-            <a:pPr indent="0" marL="0">
+            <a:pPr marL="0" indent="0">
               <a:buNone/>
             </a:pPr>
             <a:r>
-              <a:rPr lang="en-US" sz="1100" b="1" spc="300" kern="0" dirty="0">
+              <a:rPr lang="en-US" sz="1100" b="1" kern="0" spc="300" dirty="0">
                 <a:solidFill>
                   <a:srgbClr val="86BC25"/>
                 </a:solidFill>
@@ -3845,7 +3635,7 @@
           <a:bodyPr wrap="square" rtlCol="0" anchor="ctr"/>
           <a:lstStyle/>
           <a:p>
-            <a:pPr algn="r" indent="0" marL="0">
+            <a:pPr marL="0" indent="0" algn="r">
               <a:buNone/>
             </a:pPr>
             <a:r>
@@ -3859,9 +3649,6 @@
               </a:rPr>
               <a:t>Deloitte</a:t>
             </a:r>
-            <a:pPr algn="r" indent="0" marL="0">
-              <a:buNone/>
-            </a:pPr>
             <a:r>
               <a:rPr lang="en-US" sz="1500" b="1" dirty="0">
                 <a:solidFill>
@@ -3899,6 +3686,13 @@
             <a:prstDash val="solid"/>
           </a:ln>
         </p:spPr>
+        <p:txBody>
+          <a:bodyPr/>
+          <a:lstStyle/>
+          <a:p>
+            <a:endParaRPr lang="en-US"/>
+          </a:p>
+        </p:txBody>
       </p:sp>
       <p:sp>
         <p:nvSpPr>
@@ -3921,7 +3715,7 @@
           <a:bodyPr wrap="square" rtlCol="0" anchor="t"/>
           <a:lstStyle/>
           <a:p>
-            <a:pPr algn="l" indent="0" marL="0">
+            <a:pPr marL="0" indent="0" algn="l">
               <a:buNone/>
             </a:pPr>
             <a:r>
@@ -3961,6 +3755,13 @@
             <a:prstDash val="solid"/>
           </a:ln>
         </p:spPr>
+        <p:txBody>
+          <a:bodyPr/>
+          <a:lstStyle/>
+          <a:p>
+            <a:endParaRPr lang="en-US"/>
+          </a:p>
+        </p:txBody>
       </p:sp>
       <p:sp>
         <p:nvSpPr>
@@ -3983,11 +3784,11 @@
           <a:bodyPr wrap="square" rtlCol="0" anchor="ctr"/>
           <a:lstStyle/>
           <a:p>
-            <a:pPr indent="0" marL="0">
+            <a:pPr marL="0" indent="0">
               <a:buNone/>
             </a:pPr>
             <a:r>
-              <a:rPr lang="en-US" sz="950" spc="100" kern="0" dirty="0">
+              <a:rPr lang="en-US" sz="950" kern="0" spc="100" dirty="0">
                 <a:solidFill>
                   <a:srgbClr val="8E948B"/>
                 </a:solidFill>
@@ -4022,7 +3823,7 @@
           <a:bodyPr wrap="square" rtlCol="0" anchor="ctr"/>
           <a:lstStyle/>
           <a:p>
-            <a:pPr algn="r" indent="0" marL="0">
+            <a:pPr marL="0" indent="0" algn="r">
               <a:buNone/>
             </a:pPr>
             <a:r>
@@ -4059,6 +3860,13 @@
           </a:solidFill>
           <a:ln/>
         </p:spPr>
+        <p:txBody>
+          <a:bodyPr/>
+          <a:lstStyle/>
+          <a:p>
+            <a:endParaRPr lang="en-US"/>
+          </a:p>
+        </p:txBody>
       </p:sp>
       <p:sp>
         <p:nvSpPr>
@@ -4081,11 +3889,11 @@
           <a:bodyPr wrap="square" rtlCol="0" anchor="ctr"/>
           <a:lstStyle/>
           <a:p>
-            <a:pPr indent="0" marL="0">
+            <a:pPr marL="0" indent="0">
               <a:buNone/>
             </a:pPr>
             <a:r>
-              <a:rPr lang="en-US" sz="1100" b="1" spc="200" kern="0" dirty="0">
+              <a:rPr lang="en-US" sz="1100" b="1" kern="0" spc="200" dirty="0">
                 <a:solidFill>
                   <a:srgbClr val="86BC25"/>
                 </a:solidFill>
@@ -4165,12 +3973,6 @@
               </a:rPr>
               <a:t>Watch an order update live </a:t>
             </a:r>
-            <a:pPr indent="0" marL="0">
-              <a:lnSpc>
-                <a:spcPct val="112000"/>
-              </a:lnSpc>
-              <a:buNone/>
-            </a:pPr>
             <a:r>
               <a:rPr lang="en-US" sz="1500" dirty="0">
                 <a:solidFill>
@@ -4230,12 +4032,6 @@
               </a:rPr>
               <a:t>See the records land </a:t>
             </a:r>
-            <a:pPr indent="0" marL="0">
-              <a:lnSpc>
-                <a:spcPct val="112000"/>
-              </a:lnSpc>
-              <a:buNone/>
-            </a:pPr>
             <a:r>
               <a:rPr lang="en-US" sz="1500" dirty="0">
                 <a:solidFill>
@@ -4272,11 +4068,11 @@
           <a:bodyPr wrap="square" rtlCol="0" anchor="ctr"/>
           <a:lstStyle/>
           <a:p>
-            <a:pPr indent="0" marL="0">
+            <a:pPr marL="0" indent="0">
               <a:buNone/>
             </a:pPr>
             <a:r>
-              <a:rPr lang="en-US" sz="1100" b="1" spc="200" kern="0" dirty="0">
+              <a:rPr lang="en-US" sz="1100" b="1" kern="0" spc="200" dirty="0">
                 <a:solidFill>
                   <a:srgbClr val="86BC25"/>
                 </a:solidFill>
@@ -4332,12 +4128,6 @@
               </a:rPr>
               <a:t>Subscriptions (Contracts) </a:t>
             </a:r>
-            <a:pPr indent="0" marL="0">
-              <a:lnSpc>
-                <a:spcPct val="112000"/>
-              </a:lnSpc>
-              <a:buNone/>
-            </a:pPr>
             <a:r>
               <a:rPr lang="en-US" sz="1500" dirty="0">
                 <a:solidFill>
@@ -4373,12 +4163,6 @@
               </a:rPr>
               <a:t>AI features when entitled </a:t>
             </a:r>
-            <a:pPr indent="0" marL="0">
-              <a:lnSpc>
-                <a:spcPct val="112000"/>
-              </a:lnSpc>
-              <a:buNone/>
-            </a:pPr>
             <a:r>
               <a:rPr lang="en-US" sz="1500" dirty="0">
                 <a:solidFill>
@@ -4438,12 +4222,6 @@
               </a:rPr>
               <a:t>Hardened payments </a:t>
             </a:r>
-            <a:pPr indent="0" marL="0">
-              <a:lnSpc>
-                <a:spcPct val="112000"/>
-              </a:lnSpc>
-              <a:buNone/>
-            </a:pPr>
             <a:r>
               <a:rPr lang="en-US" sz="1500" dirty="0">
                 <a:solidFill>
@@ -4475,6 +4253,7 @@
         <a:solidFill>
           <a:srgbClr val="0E0F11"/>
         </a:solidFill>
+        <a:effectLst/>
       </p:bgPr>
     </p:bg>
     <p:spTree>
@@ -4512,11 +4291,11 @@
           <a:bodyPr wrap="square" rtlCol="0" anchor="ctr"/>
           <a:lstStyle/>
           <a:p>
-            <a:pPr indent="0" marL="0">
+            <a:pPr marL="0" indent="0">
               <a:buNone/>
             </a:pPr>
             <a:r>
-              <a:rPr lang="en-US" sz="1100" b="1" spc="300" kern="0" dirty="0">
+              <a:rPr lang="en-US" sz="1100" b="1" kern="0" spc="300" dirty="0">
                 <a:solidFill>
                   <a:srgbClr val="86BC25"/>
                 </a:solidFill>
@@ -4551,7 +4330,7 @@
           <a:bodyPr wrap="square" rtlCol="0" anchor="ctr"/>
           <a:lstStyle/>
           <a:p>
-            <a:pPr algn="r" indent="0" marL="0">
+            <a:pPr marL="0" indent="0" algn="r">
               <a:buNone/>
             </a:pPr>
             <a:r>
@@ -4565,9 +4344,6 @@
               </a:rPr>
               <a:t>Deloitte</a:t>
             </a:r>
-            <a:pPr algn="r" indent="0" marL="0">
-              <a:buNone/>
-            </a:pPr>
             <a:r>
               <a:rPr lang="en-US" sz="1500" b="1" dirty="0">
                 <a:solidFill>
@@ -4605,6 +4381,13 @@
             <a:prstDash val="solid"/>
           </a:ln>
         </p:spPr>
+        <p:txBody>
+          <a:bodyPr/>
+          <a:lstStyle/>
+          <a:p>
+            <a:endParaRPr lang="en-US"/>
+          </a:p>
+        </p:txBody>
       </p:sp>
       <p:sp>
         <p:nvSpPr>
@@ -4627,7 +4410,7 @@
           <a:bodyPr wrap="square" rtlCol="0" anchor="t"/>
           <a:lstStyle/>
           <a:p>
-            <a:pPr algn="l" indent="0" marL="0">
+            <a:pPr marL="0" indent="0" algn="l">
               <a:buNone/>
             </a:pPr>
             <a:r>
@@ -4667,6 +4450,13 @@
             <a:prstDash val="solid"/>
           </a:ln>
         </p:spPr>
+        <p:txBody>
+          <a:bodyPr/>
+          <a:lstStyle/>
+          <a:p>
+            <a:endParaRPr lang="en-US"/>
+          </a:p>
+        </p:txBody>
       </p:sp>
       <p:sp>
         <p:nvSpPr>
@@ -4689,11 +4479,11 @@
           <a:bodyPr wrap="square" rtlCol="0" anchor="ctr"/>
           <a:lstStyle/>
           <a:p>
-            <a:pPr indent="0" marL="0">
+            <a:pPr marL="0" indent="0">
               <a:buNone/>
             </a:pPr>
             <a:r>
-              <a:rPr lang="en-US" sz="950" spc="100" kern="0" dirty="0">
+              <a:rPr lang="en-US" sz="950" kern="0" spc="100" dirty="0">
                 <a:solidFill>
                   <a:srgbClr val="8E948B"/>
                 </a:solidFill>
@@ -4728,7 +4518,7 @@
           <a:bodyPr wrap="square" rtlCol="0" anchor="ctr"/>
           <a:lstStyle/>
           <a:p>
-            <a:pPr algn="r" indent="0" marL="0">
+            <a:pPr marL="0" indent="0" algn="r">
               <a:buNone/>
             </a:pPr>
             <a:r>
@@ -4765,6 +4555,13 @@
           </a:solidFill>
           <a:ln/>
         </p:spPr>
+        <p:txBody>
+          <a:bodyPr/>
+          <a:lstStyle/>
+          <a:p>
+            <a:endParaRPr lang="en-US"/>
+          </a:p>
+        </p:txBody>
       </p:sp>
       <p:sp>
         <p:nvSpPr>
@@ -4792,6 +4589,13 @@
             <a:prstDash val="solid"/>
           </a:ln>
         </p:spPr>
+        <p:txBody>
+          <a:bodyPr/>
+          <a:lstStyle/>
+          <a:p>
+            <a:endParaRPr lang="en-US"/>
+          </a:p>
+        </p:txBody>
       </p:sp>
       <p:sp>
         <p:nvSpPr>
@@ -4814,14 +4618,14 @@
           <a:bodyPr wrap="square" rtlCol="0" anchor="t"/>
           <a:lstStyle/>
           <a:p>
-            <a:pPr indent="0" marL="0">
+            <a:pPr marL="0" indent="0">
               <a:lnSpc>
                 <a:spcPct val="106000"/>
               </a:lnSpc>
               <a:buNone/>
             </a:pPr>
             <a:r>
-              <a:rPr lang="en-US" sz="1000" b="1" spc="200" kern="0" dirty="0">
+              <a:rPr lang="en-US" sz="1000" b="1" kern="0" spc="200" dirty="0">
                 <a:solidFill>
                   <a:srgbClr val="86BC25"/>
                 </a:solidFill>
@@ -4832,12 +4636,6 @@
               <a:t>01
 </a:t>
             </a:r>
-            <a:pPr indent="0" marL="0">
-              <a:lnSpc>
-                <a:spcPct val="106000"/>
-              </a:lnSpc>
-              <a:buNone/>
-            </a:pPr>
             <a:r>
               <a:rPr lang="en-US" sz="1500" b="1" dirty="0">
                 <a:solidFill>
@@ -4850,12 +4648,6 @@
               <a:t>The idea
 </a:t>
             </a:r>
-            <a:pPr indent="0" marL="0">
-              <a:lnSpc>
-                <a:spcPct val="106000"/>
-              </a:lnSpc>
-              <a:buNone/>
-            </a:pPr>
             <a:r>
               <a:rPr lang="en-US" sz="1150" dirty="0">
                 <a:solidFill>
@@ -4897,6 +4689,13 @@
             <a:prstDash val="solid"/>
           </a:ln>
         </p:spPr>
+        <p:txBody>
+          <a:bodyPr/>
+          <a:lstStyle/>
+          <a:p>
+            <a:endParaRPr lang="en-US"/>
+          </a:p>
+        </p:txBody>
       </p:sp>
       <p:sp>
         <p:nvSpPr>
@@ -4919,14 +4718,14 @@
           <a:bodyPr wrap="square" rtlCol="0" anchor="t"/>
           <a:lstStyle/>
           <a:p>
-            <a:pPr indent="0" marL="0">
+            <a:pPr marL="0" indent="0">
               <a:lnSpc>
                 <a:spcPct val="106000"/>
               </a:lnSpc>
               <a:buNone/>
             </a:pPr>
             <a:r>
-              <a:rPr lang="en-US" sz="1000" b="1" spc="200" kern="0" dirty="0">
+              <a:rPr lang="en-US" sz="1000" b="1" kern="0" spc="200" dirty="0">
                 <a:solidFill>
                   <a:srgbClr val="86BC25"/>
                 </a:solidFill>
@@ -4937,12 +4736,6 @@
               <a:t>02
 </a:t>
             </a:r>
-            <a:pPr indent="0" marL="0">
-              <a:lnSpc>
-                <a:spcPct val="106000"/>
-              </a:lnSpc>
-              <a:buNone/>
-            </a:pPr>
             <a:r>
               <a:rPr lang="en-US" sz="1500" b="1" dirty="0">
                 <a:solidFill>
@@ -4955,12 +4748,6 @@
               <a:t>Architecture
 </a:t>
             </a:r>
-            <a:pPr indent="0" marL="0">
-              <a:lnSpc>
-                <a:spcPct val="106000"/>
-              </a:lnSpc>
-              <a:buNone/>
-            </a:pPr>
             <a:r>
               <a:rPr lang="en-US" sz="1150" dirty="0">
                 <a:solidFill>
@@ -5002,6 +4789,13 @@
             <a:prstDash val="solid"/>
           </a:ln>
         </p:spPr>
+        <p:txBody>
+          <a:bodyPr/>
+          <a:lstStyle/>
+          <a:p>
+            <a:endParaRPr lang="en-US"/>
+          </a:p>
+        </p:txBody>
       </p:sp>
       <p:sp>
         <p:nvSpPr>
@@ -5024,14 +4818,14 @@
           <a:bodyPr wrap="square" rtlCol="0" anchor="t"/>
           <a:lstStyle/>
           <a:p>
-            <a:pPr indent="0" marL="0">
+            <a:pPr marL="0" indent="0">
               <a:lnSpc>
                 <a:spcPct val="106000"/>
               </a:lnSpc>
               <a:buNone/>
             </a:pPr>
             <a:r>
-              <a:rPr lang="en-US" sz="1000" b="1" spc="200" kern="0" dirty="0">
+              <a:rPr lang="en-US" sz="1000" b="1" kern="0" spc="200" dirty="0">
                 <a:solidFill>
                   <a:srgbClr val="86BC25"/>
                 </a:solidFill>
@@ -5042,12 +4836,6 @@
               <a:t>03
 </a:t>
             </a:r>
-            <a:pPr indent="0" marL="0">
-              <a:lnSpc>
-                <a:spcPct val="106000"/>
-              </a:lnSpc>
-              <a:buNone/>
-            </a:pPr>
             <a:r>
               <a:rPr lang="en-US" sz="1500" b="1" dirty="0">
                 <a:solidFill>
@@ -5060,12 +4848,6 @@
               <a:t>The Salesforce side
 </a:t>
             </a:r>
-            <a:pPr indent="0" marL="0">
-              <a:lnSpc>
-                <a:spcPct val="106000"/>
-              </a:lnSpc>
-              <a:buNone/>
-            </a:pPr>
             <a:r>
               <a:rPr lang="en-US" sz="1150" dirty="0">
                 <a:solidFill>
@@ -5107,6 +4889,13 @@
             <a:prstDash val="solid"/>
           </a:ln>
         </p:spPr>
+        <p:txBody>
+          <a:bodyPr/>
+          <a:lstStyle/>
+          <a:p>
+            <a:endParaRPr lang="en-US"/>
+          </a:p>
+        </p:txBody>
       </p:sp>
       <p:sp>
         <p:nvSpPr>
@@ -5129,14 +4918,14 @@
           <a:bodyPr wrap="square" rtlCol="0" anchor="t"/>
           <a:lstStyle/>
           <a:p>
-            <a:pPr indent="0" marL="0">
+            <a:pPr marL="0" indent="0">
               <a:lnSpc>
                 <a:spcPct val="106000"/>
               </a:lnSpc>
               <a:buNone/>
             </a:pPr>
             <a:r>
-              <a:rPr lang="en-US" sz="1000" b="1" spc="200" kern="0" dirty="0">
+              <a:rPr lang="en-US" sz="1000" b="1" kern="0" spc="200" dirty="0">
                 <a:solidFill>
                   <a:srgbClr val="86BC25"/>
                 </a:solidFill>
@@ -5147,12 +4936,6 @@
               <a:t>04
 </a:t>
             </a:r>
-            <a:pPr indent="0" marL="0">
-              <a:lnSpc>
-                <a:spcPct val="106000"/>
-              </a:lnSpc>
-              <a:buNone/>
-            </a:pPr>
             <a:r>
               <a:rPr lang="en-US" sz="1500" b="1" dirty="0">
                 <a:solidFill>
@@ -5165,12 +4948,6 @@
               <a:t>Security &amp; governance
 </a:t>
             </a:r>
-            <a:pPr indent="0" marL="0">
-              <a:lnSpc>
-                <a:spcPct val="106000"/>
-              </a:lnSpc>
-              <a:buNone/>
-            </a:pPr>
             <a:r>
               <a:rPr lang="en-US" sz="1150" dirty="0">
                 <a:solidFill>
@@ -5212,6 +4989,13 @@
             <a:prstDash val="solid"/>
           </a:ln>
         </p:spPr>
+        <p:txBody>
+          <a:bodyPr/>
+          <a:lstStyle/>
+          <a:p>
+            <a:endParaRPr lang="en-US"/>
+          </a:p>
+        </p:txBody>
       </p:sp>
       <p:sp>
         <p:nvSpPr>
@@ -5234,14 +5018,14 @@
           <a:bodyPr wrap="square" rtlCol="0" anchor="t"/>
           <a:lstStyle/>
           <a:p>
-            <a:pPr indent="0" marL="0">
+            <a:pPr marL="0" indent="0">
               <a:lnSpc>
                 <a:spcPct val="106000"/>
               </a:lnSpc>
               <a:buNone/>
             </a:pPr>
             <a:r>
-              <a:rPr lang="en-US" sz="1000" b="1" spc="200" kern="0" dirty="0">
+              <a:rPr lang="en-US" sz="1000" b="1" kern="0" spc="200" dirty="0">
                 <a:solidFill>
                   <a:srgbClr val="86BC25"/>
                 </a:solidFill>
@@ -5252,12 +5036,6 @@
               <a:t>05
 </a:t>
             </a:r>
-            <a:pPr indent="0" marL="0">
-              <a:lnSpc>
-                <a:spcPct val="106000"/>
-              </a:lnSpc>
-              <a:buNone/>
-            </a:pPr>
             <a:r>
               <a:rPr lang="en-US" sz="1500" b="1" dirty="0">
                 <a:solidFill>
@@ -5270,12 +5048,6 @@
               <a:t>Flows &amp; features
 </a:t>
             </a:r>
-            <a:pPr indent="0" marL="0">
-              <a:lnSpc>
-                <a:spcPct val="106000"/>
-              </a:lnSpc>
-              <a:buNone/>
-            </a:pPr>
             <a:r>
               <a:rPr lang="en-US" sz="1150" dirty="0">
                 <a:solidFill>
@@ -5317,6 +5089,13 @@
             <a:prstDash val="solid"/>
           </a:ln>
         </p:spPr>
+        <p:txBody>
+          <a:bodyPr/>
+          <a:lstStyle/>
+          <a:p>
+            <a:endParaRPr lang="en-US"/>
+          </a:p>
+        </p:txBody>
       </p:sp>
       <p:sp>
         <p:nvSpPr>
@@ -5339,14 +5118,14 @@
           <a:bodyPr wrap="square" rtlCol="0" anchor="t"/>
           <a:lstStyle/>
           <a:p>
-            <a:pPr indent="0" marL="0">
+            <a:pPr marL="0" indent="0">
               <a:lnSpc>
                 <a:spcPct val="106000"/>
               </a:lnSpc>
               <a:buNone/>
             </a:pPr>
             <a:r>
-              <a:rPr lang="en-US" sz="1000" b="1" spc="200" kern="0" dirty="0">
+              <a:rPr lang="en-US" sz="1000" b="1" kern="0" spc="200" dirty="0">
                 <a:solidFill>
                   <a:srgbClr val="86BC25"/>
                 </a:solidFill>
@@ -5357,12 +5136,6 @@
               <a:t>06
 </a:t>
             </a:r>
-            <a:pPr indent="0" marL="0">
-              <a:lnSpc>
-                <a:spcPct val="106000"/>
-              </a:lnSpc>
-              <a:buNone/>
-            </a:pPr>
             <a:r>
               <a:rPr lang="en-US" sz="1500" b="1" dirty="0">
                 <a:solidFill>
@@ -5375,12 +5148,6 @@
               <a:t>Built with AI + why it matters
 </a:t>
             </a:r>
-            <a:pPr indent="0" marL="0">
-              <a:lnSpc>
-                <a:spcPct val="106000"/>
-              </a:lnSpc>
-              <a:buNone/>
-            </a:pPr>
             <a:r>
               <a:rPr lang="en-US" sz="1150" dirty="0">
                 <a:solidFill>
@@ -5412,6 +5179,7 @@
         <a:solidFill>
           <a:srgbClr val="0E0F11"/>
         </a:solidFill>
+        <a:effectLst/>
       </p:bgPr>
     </p:bg>
     <p:spTree>
@@ -5449,11 +5217,11 @@
           <a:bodyPr wrap="square" rtlCol="0" anchor="ctr"/>
           <a:lstStyle/>
           <a:p>
-            <a:pPr indent="0" marL="0">
+            <a:pPr marL="0" indent="0">
               <a:buNone/>
             </a:pPr>
             <a:r>
-              <a:rPr lang="en-US" sz="1100" b="1" spc="300" kern="0" dirty="0">
+              <a:rPr lang="en-US" sz="1100" b="1" kern="0" spc="300" dirty="0">
                 <a:solidFill>
                   <a:srgbClr val="86BC25"/>
                 </a:solidFill>
@@ -5488,7 +5256,7 @@
           <a:bodyPr wrap="square" rtlCol="0" anchor="ctr"/>
           <a:lstStyle/>
           <a:p>
-            <a:pPr algn="r" indent="0" marL="0">
+            <a:pPr marL="0" indent="0" algn="r">
               <a:buNone/>
             </a:pPr>
             <a:r>
@@ -5502,9 +5270,6 @@
               </a:rPr>
               <a:t>Deloitte</a:t>
             </a:r>
-            <a:pPr algn="r" indent="0" marL="0">
-              <a:buNone/>
-            </a:pPr>
             <a:r>
               <a:rPr lang="en-US" sz="1500" b="1" dirty="0">
                 <a:solidFill>
@@ -5542,6 +5307,13 @@
             <a:prstDash val="solid"/>
           </a:ln>
         </p:spPr>
+        <p:txBody>
+          <a:bodyPr/>
+          <a:lstStyle/>
+          <a:p>
+            <a:endParaRPr lang="en-US"/>
+          </a:p>
+        </p:txBody>
       </p:sp>
       <p:sp>
         <p:nvSpPr>
@@ -5564,7 +5336,7 @@
           <a:bodyPr wrap="square" rtlCol="0" anchor="t"/>
           <a:lstStyle/>
           <a:p>
-            <a:pPr algn="l" indent="0" marL="0">
+            <a:pPr marL="0" indent="0" algn="l">
               <a:buNone/>
             </a:pPr>
             <a:r>
@@ -5604,6 +5376,13 @@
             <a:prstDash val="solid"/>
           </a:ln>
         </p:spPr>
+        <p:txBody>
+          <a:bodyPr/>
+          <a:lstStyle/>
+          <a:p>
+            <a:endParaRPr lang="en-US"/>
+          </a:p>
+        </p:txBody>
       </p:sp>
       <p:sp>
         <p:nvSpPr>
@@ -5626,11 +5405,11 @@
           <a:bodyPr wrap="square" rtlCol="0" anchor="ctr"/>
           <a:lstStyle/>
           <a:p>
-            <a:pPr indent="0" marL="0">
+            <a:pPr marL="0" indent="0">
               <a:buNone/>
             </a:pPr>
             <a:r>
-              <a:rPr lang="en-US" sz="950" spc="100" kern="0" dirty="0">
+              <a:rPr lang="en-US" sz="950" kern="0" spc="100" dirty="0">
                 <a:solidFill>
                   <a:srgbClr val="8E948B"/>
                 </a:solidFill>
@@ -5665,7 +5444,7 @@
           <a:bodyPr wrap="square" rtlCol="0" anchor="ctr"/>
           <a:lstStyle/>
           <a:p>
-            <a:pPr algn="r" indent="0" marL="0">
+            <a:pPr marL="0" indent="0" algn="r">
               <a:buNone/>
             </a:pPr>
             <a:r>
@@ -5702,6 +5481,13 @@
           </a:solidFill>
           <a:ln/>
         </p:spPr>
+        <p:txBody>
+          <a:bodyPr/>
+          <a:lstStyle/>
+          <a:p>
+            <a:endParaRPr lang="en-US"/>
+          </a:p>
+        </p:txBody>
       </p:sp>
       <p:sp>
         <p:nvSpPr>
@@ -5724,7 +5510,7 @@
           <a:bodyPr wrap="square" rtlCol="0" anchor="t"/>
           <a:lstStyle/>
           <a:p>
-            <a:pPr indent="0" marL="0">
+            <a:pPr marL="0" indent="0">
               <a:lnSpc>
                 <a:spcPct val="120000"/>
               </a:lnSpc>
@@ -5771,6 +5557,13 @@
             <a:prstDash val="solid"/>
           </a:ln>
         </p:spPr>
+        <p:txBody>
+          <a:bodyPr/>
+          <a:lstStyle/>
+          <a:p>
+            <a:endParaRPr lang="en-US"/>
+          </a:p>
+        </p:txBody>
       </p:sp>
       <p:sp>
         <p:nvSpPr>
@@ -5793,14 +5586,14 @@
           <a:bodyPr wrap="square" rtlCol="0" anchor="t"/>
           <a:lstStyle/>
           <a:p>
-            <a:pPr indent="0" marL="0">
+            <a:pPr marL="0" indent="0">
               <a:lnSpc>
                 <a:spcPct val="106000"/>
               </a:lnSpc>
               <a:buNone/>
             </a:pPr>
             <a:r>
-              <a:rPr lang="en-US" sz="1000" b="1" spc="200" kern="0" dirty="0">
+              <a:rPr lang="en-US" sz="1000" b="1" kern="0" spc="200" dirty="0">
                 <a:solidFill>
                   <a:srgbClr val="86BC25"/>
                 </a:solidFill>
@@ -5811,12 +5604,6 @@
               <a:t>01
 </a:t>
             </a:r>
-            <a:pPr indent="0" marL="0">
-              <a:lnSpc>
-                <a:spcPct val="106000"/>
-              </a:lnSpc>
-              <a:buNone/>
-            </a:pPr>
             <a:r>
               <a:rPr lang="en-US" sz="1500" b="1" dirty="0">
                 <a:solidFill>
@@ -5829,12 +5616,6 @@
               <a:t>Salesforce is the source of truth
 </a:t>
             </a:r>
-            <a:pPr indent="0" marL="0">
-              <a:lnSpc>
-                <a:spcPct val="106000"/>
-              </a:lnSpc>
-              <a:buNone/>
-            </a:pPr>
             <a:r>
               <a:rPr lang="en-US" sz="1150" dirty="0">
                 <a:solidFill>
@@ -5876,6 +5657,13 @@
             <a:prstDash val="solid"/>
           </a:ln>
         </p:spPr>
+        <p:txBody>
+          <a:bodyPr/>
+          <a:lstStyle/>
+          <a:p>
+            <a:endParaRPr lang="en-US"/>
+          </a:p>
+        </p:txBody>
       </p:sp>
       <p:sp>
         <p:nvSpPr>
@@ -5898,14 +5686,14 @@
           <a:bodyPr wrap="square" rtlCol="0" anchor="t"/>
           <a:lstStyle/>
           <a:p>
-            <a:pPr indent="0" marL="0">
+            <a:pPr marL="0" indent="0">
               <a:lnSpc>
                 <a:spcPct val="106000"/>
               </a:lnSpc>
               <a:buNone/>
             </a:pPr>
             <a:r>
-              <a:rPr lang="en-US" sz="1000" b="1" spc="200" kern="0" dirty="0">
+              <a:rPr lang="en-US" sz="1000" b="1" kern="0" spc="200" dirty="0">
                 <a:solidFill>
                   <a:srgbClr val="86BC25"/>
                 </a:solidFill>
@@ -5916,12 +5704,6 @@
               <a:t>02
 </a:t>
             </a:r>
-            <a:pPr indent="0" marL="0">
-              <a:lnSpc>
-                <a:spcPct val="106000"/>
-              </a:lnSpc>
-              <a:buNone/>
-            </a:pPr>
             <a:r>
               <a:rPr lang="en-US" sz="1500" b="1" dirty="0">
                 <a:solidFill>
@@ -5934,12 +5716,6 @@
               <a:t>Any modern frontend
 </a:t>
             </a:r>
-            <a:pPr indent="0" marL="0">
-              <a:lnSpc>
-                <a:spcPct val="106000"/>
-              </a:lnSpc>
-              <a:buNone/>
-            </a:pPr>
             <a:r>
               <a:rPr lang="en-US" sz="1150" dirty="0">
                 <a:solidFill>
@@ -5981,6 +5757,13 @@
             <a:prstDash val="solid"/>
           </a:ln>
         </p:spPr>
+        <p:txBody>
+          <a:bodyPr/>
+          <a:lstStyle/>
+          <a:p>
+            <a:endParaRPr lang="en-US"/>
+          </a:p>
+        </p:txBody>
       </p:sp>
       <p:sp>
         <p:nvSpPr>
@@ -6003,14 +5786,14 @@
           <a:bodyPr wrap="square" rtlCol="0" anchor="t"/>
           <a:lstStyle/>
           <a:p>
-            <a:pPr indent="0" marL="0">
+            <a:pPr marL="0" indent="0">
               <a:lnSpc>
                 <a:spcPct val="106000"/>
               </a:lnSpc>
               <a:buNone/>
             </a:pPr>
             <a:r>
-              <a:rPr lang="en-US" sz="1000" b="1" spc="200" kern="0" dirty="0">
+              <a:rPr lang="en-US" sz="1000" b="1" kern="0" spc="200" dirty="0">
                 <a:solidFill>
                   <a:srgbClr val="86BC25"/>
                 </a:solidFill>
@@ -6021,12 +5804,6 @@
               <a:t>03
 </a:t>
             </a:r>
-            <a:pPr indent="0" marL="0">
-              <a:lnSpc>
-                <a:spcPct val="106000"/>
-              </a:lnSpc>
-              <a:buNone/>
-            </a:pPr>
             <a:r>
               <a:rPr lang="en-US" sz="1500" b="1" dirty="0">
                 <a:solidFill>
@@ -6039,12 +5816,6 @@
               <a:t>A thin, secure middleware
 </a:t>
             </a:r>
-            <a:pPr indent="0" marL="0">
-              <a:lnSpc>
-                <a:spcPct val="106000"/>
-              </a:lnSpc>
-              <a:buNone/>
-            </a:pPr>
             <a:r>
               <a:rPr lang="en-US" sz="1150" dirty="0">
                 <a:solidFill>
@@ -6076,6 +5847,7 @@
         <a:solidFill>
           <a:srgbClr val="0E0F11"/>
         </a:solidFill>
+        <a:effectLst/>
       </p:bgPr>
     </p:bg>
     <p:spTree>
@@ -6113,11 +5885,11 @@
           <a:bodyPr wrap="square" rtlCol="0" anchor="ctr"/>
           <a:lstStyle/>
           <a:p>
-            <a:pPr indent="0" marL="0">
+            <a:pPr marL="0" indent="0">
               <a:buNone/>
             </a:pPr>
             <a:r>
-              <a:rPr lang="en-US" sz="1100" b="1" spc="300" kern="0" dirty="0">
+              <a:rPr lang="en-US" sz="1100" b="1" kern="0" spc="300" dirty="0">
                 <a:solidFill>
                   <a:srgbClr val="86BC25"/>
                 </a:solidFill>
@@ -6152,7 +5924,7 @@
           <a:bodyPr wrap="square" rtlCol="0" anchor="ctr"/>
           <a:lstStyle/>
           <a:p>
-            <a:pPr algn="r" indent="0" marL="0">
+            <a:pPr marL="0" indent="0" algn="r">
               <a:buNone/>
             </a:pPr>
             <a:r>
@@ -6166,9 +5938,6 @@
               </a:rPr>
               <a:t>Deloitte</a:t>
             </a:r>
-            <a:pPr algn="r" indent="0" marL="0">
-              <a:buNone/>
-            </a:pPr>
             <a:r>
               <a:rPr lang="en-US" sz="1500" b="1" dirty="0">
                 <a:solidFill>
@@ -6206,6 +5975,13 @@
             <a:prstDash val="solid"/>
           </a:ln>
         </p:spPr>
+        <p:txBody>
+          <a:bodyPr/>
+          <a:lstStyle/>
+          <a:p>
+            <a:endParaRPr lang="en-US"/>
+          </a:p>
+        </p:txBody>
       </p:sp>
       <p:sp>
         <p:nvSpPr>
@@ -6228,7 +6004,7 @@
           <a:bodyPr wrap="square" rtlCol="0" anchor="t"/>
           <a:lstStyle/>
           <a:p>
-            <a:pPr algn="l" indent="0" marL="0">
+            <a:pPr marL="0" indent="0" algn="l">
               <a:buNone/>
             </a:pPr>
             <a:r>
@@ -6268,6 +6044,13 @@
             <a:prstDash val="solid"/>
           </a:ln>
         </p:spPr>
+        <p:txBody>
+          <a:bodyPr/>
+          <a:lstStyle/>
+          <a:p>
+            <a:endParaRPr lang="en-US"/>
+          </a:p>
+        </p:txBody>
       </p:sp>
       <p:sp>
         <p:nvSpPr>
@@ -6290,11 +6073,11 @@
           <a:bodyPr wrap="square" rtlCol="0" anchor="ctr"/>
           <a:lstStyle/>
           <a:p>
-            <a:pPr indent="0" marL="0">
+            <a:pPr marL="0" indent="0">
               <a:buNone/>
             </a:pPr>
             <a:r>
-              <a:rPr lang="en-US" sz="950" spc="100" kern="0" dirty="0">
+              <a:rPr lang="en-US" sz="950" kern="0" spc="100" dirty="0">
                 <a:solidFill>
                   <a:srgbClr val="8E948B"/>
                 </a:solidFill>
@@ -6329,7 +6112,7 @@
           <a:bodyPr wrap="square" rtlCol="0" anchor="ctr"/>
           <a:lstStyle/>
           <a:p>
-            <a:pPr algn="r" indent="0" marL="0">
+            <a:pPr marL="0" indent="0" algn="r">
               <a:buNone/>
             </a:pPr>
             <a:r>
@@ -6366,6 +6149,13 @@
           </a:solidFill>
           <a:ln/>
         </p:spPr>
+        <p:txBody>
+          <a:bodyPr/>
+          <a:lstStyle/>
+          <a:p>
+            <a:endParaRPr lang="en-US"/>
+          </a:p>
+        </p:txBody>
       </p:sp>
       <p:sp>
         <p:nvSpPr>
@@ -6393,6 +6183,13 @@
             <a:prstDash val="solid"/>
           </a:ln>
         </p:spPr>
+        <p:txBody>
+          <a:bodyPr/>
+          <a:lstStyle/>
+          <a:p>
+            <a:endParaRPr lang="en-US"/>
+          </a:p>
+        </p:txBody>
       </p:sp>
       <p:sp>
         <p:nvSpPr>
@@ -6415,14 +6212,14 @@
           <a:bodyPr wrap="square" rtlCol="0" anchor="t"/>
           <a:lstStyle/>
           <a:p>
-            <a:pPr indent="0" marL="0">
+            <a:pPr marL="0" indent="0">
               <a:lnSpc>
                 <a:spcPct val="106000"/>
               </a:lnSpc>
               <a:buNone/>
             </a:pPr>
             <a:r>
-              <a:rPr lang="en-US" sz="1000" b="1" spc="200" kern="0" dirty="0">
+              <a:rPr lang="en-US" sz="1000" b="1" kern="0" spc="200" dirty="0">
                 <a:solidFill>
                   <a:srgbClr val="86BC25"/>
                 </a:solidFill>
@@ -6430,16 +6227,29 @@
                 <a:ea typeface="Arial" pitchFamily="34" charset="-122"/>
                 <a:cs typeface="Arial" pitchFamily="34" charset="-120"/>
               </a:rPr>
-              <a:t>BROWSER
-</a:t>
-            </a:r>
-            <a:pPr indent="0" marL="0">
+              <a:t>BROWSER</a:t>
+            </a:r>
+          </a:p>
+          <a:p>
+            <a:pPr marL="0" indent="0">
               <a:lnSpc>
                 <a:spcPct val="106000"/>
               </a:lnSpc>
               <a:buNone/>
             </a:pPr>
             <a:r>
+              <a:rPr lang="en-US" sz="1000" b="1" kern="0" spc="200" dirty="0">
+                <a:solidFill>
+                  <a:srgbClr val="86BC25"/>
+                </a:solidFill>
+                <a:latin typeface="Arial" pitchFamily="34" charset="0"/>
+                <a:ea typeface="Arial" pitchFamily="34" charset="-122"/>
+                <a:cs typeface="Arial" pitchFamily="34" charset="-120"/>
+              </a:rPr>
+              <a:t>
+</a:t>
+            </a:r>
+            <a:r>
               <a:rPr lang="en-US" sz="1500" b="1" dirty="0">
                 <a:solidFill>
                   <a:srgbClr val="F3F4F1"/>
@@ -6451,12 +6261,6 @@
               <a:t>React SPA (Vite)
 </a:t>
             </a:r>
-            <a:pPr indent="0" marL="0">
-              <a:lnSpc>
-                <a:spcPct val="106000"/>
-              </a:lnSpc>
-              <a:buNone/>
-            </a:pPr>
             <a:r>
               <a:rPr lang="en-US" sz="1150" dirty="0">
                 <a:solidFill>
@@ -6493,7 +6297,7 @@
           <a:bodyPr wrap="square" rtlCol="0" anchor="ctr"/>
           <a:lstStyle/>
           <a:p>
-            <a:pPr algn="ctr" indent="0" marL="0">
+            <a:pPr marL="0" indent="0" algn="ctr">
               <a:buNone/>
             </a:pPr>
             <a:r>
@@ -6537,6 +6341,13 @@
             <a:prstDash val="solid"/>
           </a:ln>
         </p:spPr>
+        <p:txBody>
+          <a:bodyPr/>
+          <a:lstStyle/>
+          <a:p>
+            <a:endParaRPr lang="en-US"/>
+          </a:p>
+        </p:txBody>
       </p:sp>
       <p:sp>
         <p:nvSpPr>
@@ -6559,14 +6370,14 @@
           <a:bodyPr wrap="square" rtlCol="0" anchor="t"/>
           <a:lstStyle/>
           <a:p>
-            <a:pPr indent="0" marL="0">
+            <a:pPr marL="0" indent="0">
               <a:lnSpc>
                 <a:spcPct val="106000"/>
               </a:lnSpc>
               <a:buNone/>
             </a:pPr>
             <a:r>
-              <a:rPr lang="en-US" sz="1000" b="1" spc="200" kern="0" dirty="0">
+              <a:rPr lang="en-US" sz="1000" b="1" kern="0" spc="200" dirty="0">
                 <a:solidFill>
                   <a:srgbClr val="86BC25"/>
                 </a:solidFill>
@@ -6574,16 +6385,29 @@
                 <a:ea typeface="Arial" pitchFamily="34" charset="-122"/>
                 <a:cs typeface="Arial" pitchFamily="34" charset="-120"/>
               </a:rPr>
-              <a:t>MIDDLEWARE
-</a:t>
-            </a:r>
-            <a:pPr indent="0" marL="0">
+              <a:t>MIDDLEWARE</a:t>
+            </a:r>
+          </a:p>
+          <a:p>
+            <a:pPr marL="0" indent="0">
               <a:lnSpc>
                 <a:spcPct val="106000"/>
               </a:lnSpc>
               <a:buNone/>
             </a:pPr>
             <a:r>
+              <a:rPr lang="en-US" sz="1000" b="1" kern="0" spc="200" dirty="0">
+                <a:solidFill>
+                  <a:srgbClr val="86BC25"/>
+                </a:solidFill>
+                <a:latin typeface="Arial" pitchFamily="34" charset="0"/>
+                <a:ea typeface="Arial" pitchFamily="34" charset="-122"/>
+                <a:cs typeface="Arial" pitchFamily="34" charset="-120"/>
+              </a:rPr>
+              <a:t>
+</a:t>
+            </a:r>
+            <a:r>
               <a:rPr lang="en-US" sz="1500" b="1" dirty="0">
                 <a:solidFill>
                   <a:srgbClr val="F3F4F1"/>
@@ -6595,12 +6419,6 @@
               <a:t>Node / Express BFF
 </a:t>
             </a:r>
-            <a:pPr indent="0" marL="0">
-              <a:lnSpc>
-                <a:spcPct val="106000"/>
-              </a:lnSpc>
-              <a:buNone/>
-            </a:pPr>
             <a:r>
               <a:rPr lang="en-US" sz="1150" dirty="0">
                 <a:solidFill>
@@ -6637,7 +6455,7 @@
           <a:bodyPr wrap="square" rtlCol="0" anchor="ctr"/>
           <a:lstStyle/>
           <a:p>
-            <a:pPr algn="ctr" indent="0" marL="0">
+            <a:pPr marL="0" indent="0" algn="ctr">
               <a:buNone/>
             </a:pPr>
             <a:r>
@@ -6681,6 +6499,13 @@
             <a:prstDash val="solid"/>
           </a:ln>
         </p:spPr>
+        <p:txBody>
+          <a:bodyPr/>
+          <a:lstStyle/>
+          <a:p>
+            <a:endParaRPr lang="en-US"/>
+          </a:p>
+        </p:txBody>
       </p:sp>
       <p:sp>
         <p:nvSpPr>
@@ -6703,14 +6528,14 @@
           <a:bodyPr wrap="square" rtlCol="0" anchor="t"/>
           <a:lstStyle/>
           <a:p>
-            <a:pPr indent="0" marL="0">
+            <a:pPr marL="0" indent="0">
               <a:lnSpc>
                 <a:spcPct val="106000"/>
               </a:lnSpc>
               <a:buNone/>
             </a:pPr>
             <a:r>
-              <a:rPr lang="en-US" sz="1000" b="1" spc="200" kern="0" dirty="0">
+              <a:rPr lang="en-US" sz="1000" b="1" kern="0" spc="200" dirty="0">
                 <a:solidFill>
                   <a:srgbClr val="86BC25"/>
                 </a:solidFill>
@@ -6718,16 +6543,29 @@
                 <a:ea typeface="Arial" pitchFamily="34" charset="-122"/>
                 <a:cs typeface="Arial" pitchFamily="34" charset="-120"/>
               </a:rPr>
-              <a:t>SYSTEM OF RECORD
-</a:t>
-            </a:r>
-            <a:pPr indent="0" marL="0">
+              <a:t>SYSTEM OF RECORD</a:t>
+            </a:r>
+          </a:p>
+          <a:p>
+            <a:pPr marL="0" indent="0">
               <a:lnSpc>
                 <a:spcPct val="106000"/>
               </a:lnSpc>
               <a:buNone/>
             </a:pPr>
             <a:r>
+              <a:rPr lang="en-US" sz="1000" b="1" kern="0" spc="200" dirty="0">
+                <a:solidFill>
+                  <a:srgbClr val="86BC25"/>
+                </a:solidFill>
+                <a:latin typeface="Arial" pitchFamily="34" charset="0"/>
+                <a:ea typeface="Arial" pitchFamily="34" charset="-122"/>
+                <a:cs typeface="Arial" pitchFamily="34" charset="-120"/>
+              </a:rPr>
+              <a:t>
+</a:t>
+            </a:r>
+            <a:r>
               <a:rPr lang="en-US" sz="1500" b="1" dirty="0">
                 <a:solidFill>
                   <a:srgbClr val="F3F4F1"/>
@@ -6739,12 +6577,6 @@
               <a:t>Salesforce
 </a:t>
             </a:r>
-            <a:pPr indent="0" marL="0">
-              <a:lnSpc>
-                <a:spcPct val="106000"/>
-              </a:lnSpc>
-              <a:buNone/>
-            </a:pPr>
             <a:r>
               <a:rPr lang="en-US" sz="1150" dirty="0">
                 <a:solidFill>
@@ -6781,7 +6613,7 @@
           <a:bodyPr wrap="square" rtlCol="0" anchor="ctr"/>
           <a:lstStyle/>
           <a:p>
-            <a:pPr algn="ctr" indent="0" marL="0">
+            <a:pPr marL="0" indent="0" algn="ctr">
               <a:buNone/>
             </a:pPr>
             <a:r>
@@ -6820,7 +6652,7 @@
           <a:bodyPr wrap="square" rtlCol="0" anchor="ctr"/>
           <a:lstStyle/>
           <a:p>
-            <a:pPr algn="ctr" indent="0" marL="0">
+            <a:pPr marL="0" indent="0" algn="ctr">
               <a:buNone/>
             </a:pPr>
             <a:r>
@@ -6864,6 +6696,13 @@
             <a:prstDash val="solid"/>
           </a:ln>
         </p:spPr>
+        <p:txBody>
+          <a:bodyPr/>
+          <a:lstStyle/>
+          <a:p>
+            <a:endParaRPr lang="en-US"/>
+          </a:p>
+        </p:txBody>
       </p:sp>
       <p:sp>
         <p:nvSpPr>
@@ -6886,7 +6725,7 @@
           <a:bodyPr wrap="square" rtlCol="0" anchor="ctr"/>
           <a:lstStyle/>
           <a:p>
-            <a:pPr algn="ctr" indent="0" marL="0">
+            <a:pPr marL="0" indent="0" algn="ctr">
               <a:buNone/>
             </a:pPr>
             <a:r>
@@ -6930,6 +6769,13 @@
             <a:prstDash val="solid"/>
           </a:ln>
         </p:spPr>
+        <p:txBody>
+          <a:bodyPr/>
+          <a:lstStyle/>
+          <a:p>
+            <a:endParaRPr lang="en-US"/>
+          </a:p>
+        </p:txBody>
       </p:sp>
       <p:sp>
         <p:nvSpPr>
@@ -6952,7 +6798,7 @@
           <a:bodyPr wrap="square" rtlCol="0" anchor="ctr"/>
           <a:lstStyle/>
           <a:p>
-            <a:pPr algn="ctr" indent="0" marL="0">
+            <a:pPr marL="0" indent="0" algn="ctr">
               <a:buNone/>
             </a:pPr>
             <a:r>
@@ -6996,6 +6842,13 @@
             <a:prstDash val="solid"/>
           </a:ln>
         </p:spPr>
+        <p:txBody>
+          <a:bodyPr/>
+          <a:lstStyle/>
+          <a:p>
+            <a:endParaRPr lang="en-US"/>
+          </a:p>
+        </p:txBody>
       </p:sp>
       <p:sp>
         <p:nvSpPr>
@@ -7018,7 +6871,7 @@
           <a:bodyPr wrap="square" rtlCol="0" anchor="ctr"/>
           <a:lstStyle/>
           <a:p>
-            <a:pPr algn="ctr" indent="0" marL="0">
+            <a:pPr marL="0" indent="0" algn="ctr">
               <a:buNone/>
             </a:pPr>
             <a:r>
@@ -7062,6 +6915,13 @@
             <a:prstDash val="solid"/>
           </a:ln>
         </p:spPr>
+        <p:txBody>
+          <a:bodyPr/>
+          <a:lstStyle/>
+          <a:p>
+            <a:endParaRPr lang="en-US"/>
+          </a:p>
+        </p:txBody>
       </p:sp>
       <p:sp>
         <p:nvSpPr>
@@ -7084,7 +6944,7 @@
           <a:bodyPr wrap="square" rtlCol="0" anchor="ctr"/>
           <a:lstStyle/>
           <a:p>
-            <a:pPr algn="ctr" indent="0" marL="0">
+            <a:pPr marL="0" indent="0" algn="ctr">
               <a:buNone/>
             </a:pPr>
             <a:r>
@@ -7118,6 +6978,7 @@
         <a:solidFill>
           <a:srgbClr val="0E0F11"/>
         </a:solidFill>
+        <a:effectLst/>
       </p:bgPr>
     </p:bg>
     <p:spTree>
@@ -7155,11 +7016,11 @@
           <a:bodyPr wrap="square" rtlCol="0" anchor="ctr"/>
           <a:lstStyle/>
           <a:p>
-            <a:pPr indent="0" marL="0">
+            <a:pPr marL="0" indent="0">
               <a:buNone/>
             </a:pPr>
             <a:r>
-              <a:rPr lang="en-US" sz="1100" b="1" spc="300" kern="0" dirty="0">
+              <a:rPr lang="en-US" sz="1100" b="1" kern="0" spc="300" dirty="0">
                 <a:solidFill>
                   <a:srgbClr val="86BC25"/>
                 </a:solidFill>
@@ -7194,7 +7055,7 @@
           <a:bodyPr wrap="square" rtlCol="0" anchor="ctr"/>
           <a:lstStyle/>
           <a:p>
-            <a:pPr algn="r" indent="0" marL="0">
+            <a:pPr marL="0" indent="0" algn="r">
               <a:buNone/>
             </a:pPr>
             <a:r>
@@ -7208,9 +7069,6 @@
               </a:rPr>
               <a:t>Deloitte</a:t>
             </a:r>
-            <a:pPr algn="r" indent="0" marL="0">
-              <a:buNone/>
-            </a:pPr>
             <a:r>
               <a:rPr lang="en-US" sz="1500" b="1" dirty="0">
                 <a:solidFill>
@@ -7248,6 +7106,13 @@
             <a:prstDash val="solid"/>
           </a:ln>
         </p:spPr>
+        <p:txBody>
+          <a:bodyPr/>
+          <a:lstStyle/>
+          <a:p>
+            <a:endParaRPr lang="en-US"/>
+          </a:p>
+        </p:txBody>
       </p:sp>
       <p:sp>
         <p:nvSpPr>
@@ -7270,7 +7135,7 @@
           <a:bodyPr wrap="square" rtlCol="0" anchor="t"/>
           <a:lstStyle/>
           <a:p>
-            <a:pPr algn="l" indent="0" marL="0">
+            <a:pPr marL="0" indent="0" algn="l">
               <a:buNone/>
             </a:pPr>
             <a:r>
@@ -7310,6 +7175,13 @@
             <a:prstDash val="solid"/>
           </a:ln>
         </p:spPr>
+        <p:txBody>
+          <a:bodyPr/>
+          <a:lstStyle/>
+          <a:p>
+            <a:endParaRPr lang="en-US"/>
+          </a:p>
+        </p:txBody>
       </p:sp>
       <p:sp>
         <p:nvSpPr>
@@ -7332,11 +7204,11 @@
           <a:bodyPr wrap="square" rtlCol="0" anchor="ctr"/>
           <a:lstStyle/>
           <a:p>
-            <a:pPr indent="0" marL="0">
+            <a:pPr marL="0" indent="0">
               <a:buNone/>
             </a:pPr>
             <a:r>
-              <a:rPr lang="en-US" sz="950" spc="100" kern="0" dirty="0">
+              <a:rPr lang="en-US" sz="950" kern="0" spc="100" dirty="0">
                 <a:solidFill>
                   <a:srgbClr val="8E948B"/>
                 </a:solidFill>
@@ -7371,7 +7243,7 @@
           <a:bodyPr wrap="square" rtlCol="0" anchor="ctr"/>
           <a:lstStyle/>
           <a:p>
-            <a:pPr algn="r" indent="0" marL="0">
+            <a:pPr marL="0" indent="0" algn="r">
               <a:buNone/>
             </a:pPr>
             <a:r>
@@ -7408,6 +7280,13 @@
           </a:solidFill>
           <a:ln/>
         </p:spPr>
+        <p:txBody>
+          <a:bodyPr/>
+          <a:lstStyle/>
+          <a:p>
+            <a:endParaRPr lang="en-US"/>
+          </a:p>
+        </p:txBody>
       </p:sp>
       <p:sp>
         <p:nvSpPr>
@@ -7430,11 +7309,11 @@
           <a:bodyPr wrap="square" rtlCol="0" anchor="ctr"/>
           <a:lstStyle/>
           <a:p>
-            <a:pPr indent="0" marL="0">
+            <a:pPr marL="0" indent="0">
               <a:buNone/>
             </a:pPr>
             <a:r>
-              <a:rPr lang="en-US" sz="1100" b="1" spc="200" kern="0" dirty="0">
+              <a:rPr lang="en-US" sz="1100" b="1" kern="0" spc="200" dirty="0">
                 <a:solidFill>
                   <a:srgbClr val="86BC25"/>
                 </a:solidFill>
@@ -7490,12 +7369,6 @@
               </a:rPr>
               <a:t>Product2 + Pricebook </a:t>
             </a:r>
-            <a:pPr indent="0" marL="0">
-              <a:lnSpc>
-                <a:spcPct val="112000"/>
-              </a:lnSpc>
-              <a:buNone/>
-            </a:pPr>
             <a:r>
               <a:rPr lang="en-US" sz="1500" dirty="0">
                 <a:solidFill>
@@ -7531,12 +7404,6 @@
               </a:rPr>
               <a:t>Order + OrderItem + OrderSummary </a:t>
             </a:r>
-            <a:pPr indent="0" marL="0">
-              <a:lnSpc>
-                <a:spcPct val="112000"/>
-              </a:lnSpc>
-              <a:buNone/>
-            </a:pPr>
             <a:r>
               <a:rPr lang="en-US" sz="1500" dirty="0">
                 <a:solidFill>
@@ -7572,12 +7439,6 @@
               </a:rPr>
               <a:t>Person Accounts · Wishlist </a:t>
             </a:r>
-            <a:pPr indent="0" marL="0">
-              <a:lnSpc>
-                <a:spcPct val="112000"/>
-              </a:lnSpc>
-              <a:buNone/>
-            </a:pPr>
             <a:r>
               <a:rPr lang="en-US" sz="1500" dirty="0">
                 <a:solidFill>
@@ -7613,12 +7474,6 @@
               </a:rPr>
               <a:t>Case + CaseComment </a:t>
             </a:r>
-            <a:pPr indent="0" marL="0">
-              <a:lnSpc>
-                <a:spcPct val="112000"/>
-              </a:lnSpc>
-              <a:buNone/>
-            </a:pPr>
             <a:r>
               <a:rPr lang="en-US" sz="1500" dirty="0">
                 <a:solidFill>
@@ -7655,11 +7510,11 @@
           <a:bodyPr wrap="square" rtlCol="0" anchor="ctr"/>
           <a:lstStyle/>
           <a:p>
-            <a:pPr indent="0" marL="0">
+            <a:pPr marL="0" indent="0">
               <a:buNone/>
             </a:pPr>
             <a:r>
-              <a:rPr lang="en-US" sz="1100" b="1" spc="200" kern="0" dirty="0">
+              <a:rPr lang="en-US" sz="1100" b="1" kern="0" spc="200" dirty="0">
                 <a:solidFill>
                   <a:srgbClr val="86BC25"/>
                 </a:solidFill>
@@ -7715,12 +7570,6 @@
               </a:rPr>
               <a:t>Order fields </a:t>
             </a:r>
-            <a:pPr indent="0" marL="0">
-              <a:lnSpc>
-                <a:spcPct val="112000"/>
-              </a:lnSpc>
-              <a:buNone/>
-            </a:pPr>
             <a:r>
               <a:rPr lang="en-US" sz="1500" dirty="0">
                 <a:solidFill>
@@ -7756,12 +7605,6 @@
               </a:rPr>
               <a:t>Product Reviews </a:t>
             </a:r>
-            <a:pPr indent="0" marL="0">
-              <a:lnSpc>
-                <a:spcPct val="112000"/>
-              </a:lnSpc>
-              <a:buNone/>
-            </a:pPr>
             <a:r>
               <a:rPr lang="en-US" sz="1500" dirty="0">
                 <a:solidFill>
@@ -7797,12 +7640,6 @@
               </a:rPr>
               <a:t>One command </a:t>
             </a:r>
-            <a:pPr indent="0" marL="0">
-              <a:lnSpc>
-                <a:spcPct val="112000"/>
-              </a:lnSpc>
-              <a:buNone/>
-            </a:pPr>
             <a:r>
               <a:rPr lang="en-US" sz="1500" dirty="0">
                 <a:solidFill>
@@ -7838,12 +7675,6 @@
               </a:rPr>
               <a:t>One permission set </a:t>
             </a:r>
-            <a:pPr indent="0" marL="0">
-              <a:lnSpc>
-                <a:spcPct val="112000"/>
-              </a:lnSpc>
-              <a:buNone/>
-            </a:pPr>
             <a:r>
               <a:rPr lang="en-US" sz="1500" dirty="0">
                 <a:solidFill>
@@ -7885,6 +7716,13 @@
             <a:prstDash val="solid"/>
           </a:ln>
         </p:spPr>
+        <p:txBody>
+          <a:bodyPr/>
+          <a:lstStyle/>
+          <a:p>
+            <a:endParaRPr lang="en-US"/>
+          </a:p>
+        </p:txBody>
       </p:sp>
       <p:sp>
         <p:nvSpPr>
@@ -7907,7 +7745,7 @@
           <a:bodyPr wrap="square" rtlCol="0" anchor="ctr"/>
           <a:lstStyle/>
           <a:p>
-            <a:pPr indent="0" marL="0">
+            <a:pPr marL="0" indent="0">
               <a:buNone/>
             </a:pPr>
             <a:r>
@@ -7921,9 +7759,6 @@
               </a:rPr>
               <a:t>Governance principle:  </a:t>
             </a:r>
-            <a:pPr indent="0" marL="0">
-              <a:buNone/>
-            </a:pPr>
             <a:r>
               <a:rPr lang="en-US" sz="1200" dirty="0">
                 <a:solidFill>
@@ -7955,6 +7790,7 @@
         <a:solidFill>
           <a:srgbClr val="0E0F11"/>
         </a:solidFill>
+        <a:effectLst/>
       </p:bgPr>
     </p:bg>
     <p:spTree>
@@ -7992,11 +7828,11 @@
           <a:bodyPr wrap="square" rtlCol="0" anchor="ctr"/>
           <a:lstStyle/>
           <a:p>
-            <a:pPr indent="0" marL="0">
+            <a:pPr marL="0" indent="0">
               <a:buNone/>
             </a:pPr>
             <a:r>
-              <a:rPr lang="en-US" sz="1100" b="1" spc="300" kern="0" dirty="0">
+              <a:rPr lang="en-US" sz="1100" b="1" kern="0" spc="300" dirty="0">
                 <a:solidFill>
                   <a:srgbClr val="86BC25"/>
                 </a:solidFill>
@@ -8031,7 +7867,7 @@
           <a:bodyPr wrap="square" rtlCol="0" anchor="ctr"/>
           <a:lstStyle/>
           <a:p>
-            <a:pPr algn="r" indent="0" marL="0">
+            <a:pPr marL="0" indent="0" algn="r">
               <a:buNone/>
             </a:pPr>
             <a:r>
@@ -8045,9 +7881,6 @@
               </a:rPr>
               <a:t>Deloitte</a:t>
             </a:r>
-            <a:pPr algn="r" indent="0" marL="0">
-              <a:buNone/>
-            </a:pPr>
             <a:r>
               <a:rPr lang="en-US" sz="1500" b="1" dirty="0">
                 <a:solidFill>
@@ -8085,6 +7918,13 @@
             <a:prstDash val="solid"/>
           </a:ln>
         </p:spPr>
+        <p:txBody>
+          <a:bodyPr/>
+          <a:lstStyle/>
+          <a:p>
+            <a:endParaRPr lang="en-US"/>
+          </a:p>
+        </p:txBody>
       </p:sp>
       <p:sp>
         <p:nvSpPr>
@@ -8107,7 +7947,7 @@
           <a:bodyPr wrap="square" rtlCol="0" anchor="t"/>
           <a:lstStyle/>
           <a:p>
-            <a:pPr algn="l" indent="0" marL="0">
+            <a:pPr marL="0" indent="0" algn="l">
               <a:buNone/>
             </a:pPr>
             <a:r>
@@ -8147,6 +7987,13 @@
             <a:prstDash val="solid"/>
           </a:ln>
         </p:spPr>
+        <p:txBody>
+          <a:bodyPr/>
+          <a:lstStyle/>
+          <a:p>
+            <a:endParaRPr lang="en-US"/>
+          </a:p>
+        </p:txBody>
       </p:sp>
       <p:sp>
         <p:nvSpPr>
@@ -8169,11 +8016,11 @@
           <a:bodyPr wrap="square" rtlCol="0" anchor="ctr"/>
           <a:lstStyle/>
           <a:p>
-            <a:pPr indent="0" marL="0">
+            <a:pPr marL="0" indent="0">
               <a:buNone/>
             </a:pPr>
             <a:r>
-              <a:rPr lang="en-US" sz="950" spc="100" kern="0" dirty="0">
+              <a:rPr lang="en-US" sz="950" kern="0" spc="100" dirty="0">
                 <a:solidFill>
                   <a:srgbClr val="8E948B"/>
                 </a:solidFill>
@@ -8208,7 +8055,7 @@
           <a:bodyPr wrap="square" rtlCol="0" anchor="ctr"/>
           <a:lstStyle/>
           <a:p>
-            <a:pPr algn="r" indent="0" marL="0">
+            <a:pPr marL="0" indent="0" algn="r">
               <a:buNone/>
             </a:pPr>
             <a:r>
@@ -8245,6 +8092,13 @@
           </a:solidFill>
           <a:ln/>
         </p:spPr>
+        <p:txBody>
+          <a:bodyPr/>
+          <a:lstStyle/>
+          <a:p>
+            <a:endParaRPr lang="en-US"/>
+          </a:p>
+        </p:txBody>
       </p:sp>
       <p:sp>
         <p:nvSpPr>
@@ -8272,6 +8126,13 @@
             <a:prstDash val="solid"/>
           </a:ln>
         </p:spPr>
+        <p:txBody>
+          <a:bodyPr/>
+          <a:lstStyle/>
+          <a:p>
+            <a:endParaRPr lang="en-US"/>
+          </a:p>
+        </p:txBody>
       </p:sp>
       <p:sp>
         <p:nvSpPr>
@@ -8294,14 +8155,14 @@
           <a:bodyPr wrap="square" rtlCol="0" anchor="t"/>
           <a:lstStyle/>
           <a:p>
-            <a:pPr indent="0" marL="0">
+            <a:pPr marL="0" indent="0">
               <a:lnSpc>
                 <a:spcPct val="106000"/>
               </a:lnSpc>
               <a:buNone/>
             </a:pPr>
             <a:r>
-              <a:rPr lang="en-US" sz="1000" b="1" spc="200" kern="0" dirty="0">
+              <a:rPr lang="en-US" sz="1000" b="1" kern="0" spc="200" dirty="0">
                 <a:solidFill>
                   <a:srgbClr val="86BC25"/>
                 </a:solidFill>
@@ -8309,16 +8170,29 @@
                 <a:ea typeface="Arial" pitchFamily="34" charset="-122"/>
                 <a:cs typeface="Arial" pitchFamily="34" charset="-120"/>
               </a:rPr>
-              <a:t>CREDENTIALS
-</a:t>
-            </a:r>
-            <a:pPr indent="0" marL="0">
+              <a:t>CREDENTIALS</a:t>
+            </a:r>
+          </a:p>
+          <a:p>
+            <a:pPr marL="0" indent="0">
               <a:lnSpc>
                 <a:spcPct val="106000"/>
               </a:lnSpc>
               <a:buNone/>
             </a:pPr>
             <a:r>
+              <a:rPr lang="en-US" sz="1000" b="1" kern="0" spc="200" dirty="0">
+                <a:solidFill>
+                  <a:srgbClr val="86BC25"/>
+                </a:solidFill>
+                <a:latin typeface="Arial" pitchFamily="34" charset="0"/>
+                <a:ea typeface="Arial" pitchFamily="34" charset="-122"/>
+                <a:cs typeface="Arial" pitchFamily="34" charset="-120"/>
+              </a:rPr>
+              <a:t>
+</a:t>
+            </a:r>
+            <a:r>
               <a:rPr lang="en-US" sz="1400" b="1" dirty="0">
                 <a:solidFill>
                   <a:srgbClr val="F3F4F1"/>
@@ -8330,12 +8204,6 @@
               <a:t>Server-side only
 </a:t>
             </a:r>
-            <a:pPr indent="0" marL="0">
-              <a:lnSpc>
-                <a:spcPct val="106000"/>
-              </a:lnSpc>
-              <a:buNone/>
-            </a:pPr>
             <a:r>
               <a:rPr lang="en-US" sz="1150" dirty="0">
                 <a:solidFill>
@@ -8377,6 +8245,13 @@
             <a:prstDash val="solid"/>
           </a:ln>
         </p:spPr>
+        <p:txBody>
+          <a:bodyPr/>
+          <a:lstStyle/>
+          <a:p>
+            <a:endParaRPr lang="en-US"/>
+          </a:p>
+        </p:txBody>
       </p:sp>
       <p:sp>
         <p:nvSpPr>
@@ -8399,14 +8274,14 @@
           <a:bodyPr wrap="square" rtlCol="0" anchor="t"/>
           <a:lstStyle/>
           <a:p>
-            <a:pPr indent="0" marL="0">
+            <a:pPr marL="0" indent="0">
               <a:lnSpc>
                 <a:spcPct val="106000"/>
               </a:lnSpc>
               <a:buNone/>
             </a:pPr>
             <a:r>
-              <a:rPr lang="en-US" sz="1000" b="1" spc="200" kern="0" dirty="0">
+              <a:rPr lang="en-US" sz="1000" b="1" kern="0" spc="200" dirty="0">
                 <a:solidFill>
                   <a:srgbClr val="86BC25"/>
                 </a:solidFill>
@@ -8414,16 +8289,29 @@
                 <a:ea typeface="Arial" pitchFamily="34" charset="-122"/>
                 <a:cs typeface="Arial" pitchFamily="34" charset="-120"/>
               </a:rPr>
-              <a:t>SESSIONS
-</a:t>
-            </a:r>
-            <a:pPr indent="0" marL="0">
+              <a:t>SESSIONS</a:t>
+            </a:r>
+          </a:p>
+          <a:p>
+            <a:pPr marL="0" indent="0">
               <a:lnSpc>
                 <a:spcPct val="106000"/>
               </a:lnSpc>
               <a:buNone/>
             </a:pPr>
             <a:r>
+              <a:rPr lang="en-US" sz="1000" b="1" kern="0" spc="200" dirty="0">
+                <a:solidFill>
+                  <a:srgbClr val="86BC25"/>
+                </a:solidFill>
+                <a:latin typeface="Arial" pitchFamily="34" charset="0"/>
+                <a:ea typeface="Arial" pitchFamily="34" charset="-122"/>
+                <a:cs typeface="Arial" pitchFamily="34" charset="-120"/>
+              </a:rPr>
+              <a:t>
+</a:t>
+            </a:r>
+            <a:r>
               <a:rPr lang="en-US" sz="1400" b="1" dirty="0">
                 <a:solidFill>
                   <a:srgbClr val="F3F4F1"/>
@@ -8435,12 +8323,6 @@
               <a:t>httpOnly cookie
 </a:t>
             </a:r>
-            <a:pPr indent="0" marL="0">
-              <a:lnSpc>
-                <a:spcPct val="106000"/>
-              </a:lnSpc>
-              <a:buNone/>
-            </a:pPr>
             <a:r>
               <a:rPr lang="en-US" sz="1150" dirty="0">
                 <a:solidFill>
@@ -8482,6 +8364,13 @@
             <a:prstDash val="solid"/>
           </a:ln>
         </p:spPr>
+        <p:txBody>
+          <a:bodyPr/>
+          <a:lstStyle/>
+          <a:p>
+            <a:endParaRPr lang="en-US"/>
+          </a:p>
+        </p:txBody>
       </p:sp>
       <p:sp>
         <p:nvSpPr>
@@ -8504,14 +8393,14 @@
           <a:bodyPr wrap="square" rtlCol="0" anchor="t"/>
           <a:lstStyle/>
           <a:p>
-            <a:pPr indent="0" marL="0">
+            <a:pPr marL="0" indent="0">
               <a:lnSpc>
                 <a:spcPct val="106000"/>
               </a:lnSpc>
               <a:buNone/>
             </a:pPr>
             <a:r>
-              <a:rPr lang="en-US" sz="1000" b="1" spc="200" kern="0" dirty="0">
+              <a:rPr lang="en-US" sz="1000" b="1" kern="0" spc="200" dirty="0">
                 <a:solidFill>
                   <a:srgbClr val="86BC25"/>
                 </a:solidFill>
@@ -8519,16 +8408,29 @@
                 <a:ea typeface="Arial" pitchFamily="34" charset="-122"/>
                 <a:cs typeface="Arial" pitchFamily="34" charset="-120"/>
               </a:rPr>
-              <a:t>MONEY &amp; STOCK
-</a:t>
-            </a:r>
-            <a:pPr indent="0" marL="0">
+              <a:t>MONEY &amp; STOCK</a:t>
+            </a:r>
+          </a:p>
+          <a:p>
+            <a:pPr marL="0" indent="0">
               <a:lnSpc>
                 <a:spcPct val="106000"/>
               </a:lnSpc>
               <a:buNone/>
             </a:pPr>
             <a:r>
+              <a:rPr lang="en-US" sz="1000" b="1" kern="0" spc="200" dirty="0">
+                <a:solidFill>
+                  <a:srgbClr val="86BC25"/>
+                </a:solidFill>
+                <a:latin typeface="Arial" pitchFamily="34" charset="0"/>
+                <a:ea typeface="Arial" pitchFamily="34" charset="-122"/>
+                <a:cs typeface="Arial" pitchFamily="34" charset="-120"/>
+              </a:rPr>
+              <a:t>
+</a:t>
+            </a:r>
+            <a:r>
               <a:rPr lang="en-US" sz="1400" b="1" dirty="0">
                 <a:solidFill>
                   <a:srgbClr val="F3F4F1"/>
@@ -8540,12 +8442,6 @@
               <a:t>Server-computed
 </a:t>
             </a:r>
-            <a:pPr indent="0" marL="0">
-              <a:lnSpc>
-                <a:spcPct val="106000"/>
-              </a:lnSpc>
-              <a:buNone/>
-            </a:pPr>
             <a:r>
               <a:rPr lang="en-US" sz="1150" dirty="0">
                 <a:solidFill>
@@ -8587,6 +8483,13 @@
             <a:prstDash val="solid"/>
           </a:ln>
         </p:spPr>
+        <p:txBody>
+          <a:bodyPr/>
+          <a:lstStyle/>
+          <a:p>
+            <a:endParaRPr lang="en-US"/>
+          </a:p>
+        </p:txBody>
       </p:sp>
       <p:sp>
         <p:nvSpPr>
@@ -8609,14 +8512,14 @@
           <a:bodyPr wrap="square" rtlCol="0" anchor="t"/>
           <a:lstStyle/>
           <a:p>
-            <a:pPr indent="0" marL="0">
+            <a:pPr marL="0" indent="0">
               <a:lnSpc>
                 <a:spcPct val="106000"/>
               </a:lnSpc>
               <a:buNone/>
             </a:pPr>
             <a:r>
-              <a:rPr lang="en-US" sz="1000" b="1" spc="200" kern="0" dirty="0">
+              <a:rPr lang="en-US" sz="1000" b="1" kern="0" spc="200" dirty="0">
                 <a:solidFill>
                   <a:srgbClr val="86BC25"/>
                 </a:solidFill>
@@ -8624,16 +8527,29 @@
                 <a:ea typeface="Arial" pitchFamily="34" charset="-122"/>
                 <a:cs typeface="Arial" pitchFamily="34" charset="-120"/>
               </a:rPr>
-              <a:t>ACCESS
-</a:t>
-            </a:r>
-            <a:pPr indent="0" marL="0">
+              <a:t>ACCESS</a:t>
+            </a:r>
+          </a:p>
+          <a:p>
+            <a:pPr marL="0" indent="0">
               <a:lnSpc>
                 <a:spcPct val="106000"/>
               </a:lnSpc>
               <a:buNone/>
             </a:pPr>
             <a:r>
+              <a:rPr lang="en-US" sz="1000" b="1" kern="0" spc="200" dirty="0">
+                <a:solidFill>
+                  <a:srgbClr val="86BC25"/>
+                </a:solidFill>
+                <a:latin typeface="Arial" pitchFamily="34" charset="0"/>
+                <a:ea typeface="Arial" pitchFamily="34" charset="-122"/>
+                <a:cs typeface="Arial" pitchFamily="34" charset="-120"/>
+              </a:rPr>
+              <a:t>
+</a:t>
+            </a:r>
+            <a:r>
               <a:rPr lang="en-US" sz="1400" b="1" dirty="0">
                 <a:solidFill>
                   <a:srgbClr val="F3F4F1"/>
@@ -8645,12 +8561,6 @@
               <a:t>One permission set
 </a:t>
             </a:r>
-            <a:pPr indent="0" marL="0">
-              <a:lnSpc>
-                <a:spcPct val="106000"/>
-              </a:lnSpc>
-              <a:buNone/>
-            </a:pPr>
             <a:r>
               <a:rPr lang="en-US" sz="1150" dirty="0">
                 <a:solidFill>
@@ -8692,6 +8602,13 @@
             <a:prstDash val="solid"/>
           </a:ln>
         </p:spPr>
+        <p:txBody>
+          <a:bodyPr/>
+          <a:lstStyle/>
+          <a:p>
+            <a:endParaRPr lang="en-US"/>
+          </a:p>
+        </p:txBody>
       </p:sp>
       <p:sp>
         <p:nvSpPr>
@@ -8714,14 +8631,14 @@
           <a:bodyPr wrap="square" rtlCol="0" anchor="t"/>
           <a:lstStyle/>
           <a:p>
-            <a:pPr indent="0" marL="0">
+            <a:pPr marL="0" indent="0">
               <a:lnSpc>
                 <a:spcPct val="106000"/>
               </a:lnSpc>
               <a:buNone/>
             </a:pPr>
             <a:r>
-              <a:rPr lang="en-US" sz="1000" b="1" spc="200" kern="0" dirty="0">
+              <a:rPr lang="en-US" sz="1000" b="1" kern="0" spc="200" dirty="0">
                 <a:solidFill>
                   <a:srgbClr val="86BC25"/>
                 </a:solidFill>
@@ -8729,16 +8646,29 @@
                 <a:ea typeface="Arial" pitchFamily="34" charset="-122"/>
                 <a:cs typeface="Arial" pitchFamily="34" charset="-120"/>
               </a:rPr>
-              <a:t>GUEST TRACKING
-</a:t>
-            </a:r>
-            <a:pPr indent="0" marL="0">
+              <a:t>GUEST ORDER TRACKING</a:t>
+            </a:r>
+          </a:p>
+          <a:p>
+            <a:pPr marL="0" indent="0">
               <a:lnSpc>
                 <a:spcPct val="106000"/>
               </a:lnSpc>
               <a:buNone/>
             </a:pPr>
             <a:r>
+              <a:rPr lang="en-US" sz="1000" b="1" kern="0" spc="200" dirty="0">
+                <a:solidFill>
+                  <a:srgbClr val="86BC25"/>
+                </a:solidFill>
+                <a:latin typeface="Arial" pitchFamily="34" charset="0"/>
+                <a:ea typeface="Arial" pitchFamily="34" charset="-122"/>
+                <a:cs typeface="Arial" pitchFamily="34" charset="-120"/>
+              </a:rPr>
+              <a:t>
+</a:t>
+            </a:r>
+            <a:r>
               <a:rPr lang="en-US" sz="1400" b="1" dirty="0">
                 <a:solidFill>
                   <a:srgbClr val="F3F4F1"/>
@@ -8750,12 +8680,6 @@
               <a:t>No enumeration
 </a:t>
             </a:r>
-            <a:pPr indent="0" marL="0">
-              <a:lnSpc>
-                <a:spcPct val="106000"/>
-              </a:lnSpc>
-              <a:buNone/>
-            </a:pPr>
             <a:r>
               <a:rPr lang="en-US" sz="1150" dirty="0">
                 <a:solidFill>
@@ -8797,6 +8721,13 @@
             <a:prstDash val="solid"/>
           </a:ln>
         </p:spPr>
+        <p:txBody>
+          <a:bodyPr/>
+          <a:lstStyle/>
+          <a:p>
+            <a:endParaRPr lang="en-US"/>
+          </a:p>
+        </p:txBody>
       </p:sp>
       <p:sp>
         <p:nvSpPr>
@@ -8819,14 +8750,14 @@
           <a:bodyPr wrap="square" rtlCol="0" anchor="t"/>
           <a:lstStyle/>
           <a:p>
-            <a:pPr indent="0" marL="0">
+            <a:pPr marL="0" indent="0">
               <a:lnSpc>
                 <a:spcPct val="106000"/>
               </a:lnSpc>
               <a:buNone/>
             </a:pPr>
             <a:r>
-              <a:rPr lang="en-US" sz="1000" b="1" spc="200" kern="0" dirty="0">
+              <a:rPr lang="en-US" sz="1000" b="1" kern="0" spc="200" dirty="0">
                 <a:solidFill>
                   <a:srgbClr val="86BC25"/>
                 </a:solidFill>
@@ -8834,16 +8765,29 @@
                 <a:ea typeface="Arial" pitchFamily="34" charset="-122"/>
                 <a:cs typeface="Arial" pitchFamily="34" charset="-120"/>
               </a:rPr>
-              <a:t>SUPPORT PRIVACY
-</a:t>
-            </a:r>
-            <a:pPr indent="0" marL="0">
+              <a:t>SUPPORT PRIVACY</a:t>
+            </a:r>
+          </a:p>
+          <a:p>
+            <a:pPr marL="0" indent="0">
               <a:lnSpc>
                 <a:spcPct val="106000"/>
               </a:lnSpc>
               <a:buNone/>
             </a:pPr>
             <a:r>
+              <a:rPr lang="en-US" sz="1000" b="1" kern="0" spc="200" dirty="0">
+                <a:solidFill>
+                  <a:srgbClr val="86BC25"/>
+                </a:solidFill>
+                <a:latin typeface="Arial" pitchFamily="34" charset="0"/>
+                <a:ea typeface="Arial" pitchFamily="34" charset="-122"/>
+                <a:cs typeface="Arial" pitchFamily="34" charset="-120"/>
+              </a:rPr>
+              <a:t>
+</a:t>
+            </a:r>
+            <a:r>
               <a:rPr lang="en-US" sz="1400" b="1" dirty="0">
                 <a:solidFill>
                   <a:srgbClr val="F3F4F1"/>
@@ -8855,12 +8799,6 @@
               <a:t>Public replies only
 </a:t>
             </a:r>
-            <a:pPr indent="0" marL="0">
-              <a:lnSpc>
-                <a:spcPct val="106000"/>
-              </a:lnSpc>
-              <a:buNone/>
-            </a:pPr>
             <a:r>
               <a:rPr lang="en-US" sz="1150" dirty="0">
                 <a:solidFill>
@@ -8892,6 +8830,7 @@
         <a:solidFill>
           <a:srgbClr val="0E0F11"/>
         </a:solidFill>
+        <a:effectLst/>
       </p:bgPr>
     </p:bg>
     <p:spTree>
@@ -8929,11 +8868,11 @@
           <a:bodyPr wrap="square" rtlCol="0" anchor="ctr"/>
           <a:lstStyle/>
           <a:p>
-            <a:pPr indent="0" marL="0">
+            <a:pPr marL="0" indent="0">
               <a:buNone/>
             </a:pPr>
             <a:r>
-              <a:rPr lang="en-US" sz="1100" b="1" spc="300" kern="0" dirty="0">
+              <a:rPr lang="en-US" sz="1100" b="1" kern="0" spc="300" dirty="0">
                 <a:solidFill>
                   <a:srgbClr val="86BC25"/>
                 </a:solidFill>
@@ -8968,7 +8907,7 @@
           <a:bodyPr wrap="square" rtlCol="0" anchor="ctr"/>
           <a:lstStyle/>
           <a:p>
-            <a:pPr algn="r" indent="0" marL="0">
+            <a:pPr marL="0" indent="0" algn="r">
               <a:buNone/>
             </a:pPr>
             <a:r>
@@ -8982,9 +8921,6 @@
               </a:rPr>
               <a:t>Deloitte</a:t>
             </a:r>
-            <a:pPr algn="r" indent="0" marL="0">
-              <a:buNone/>
-            </a:pPr>
             <a:r>
               <a:rPr lang="en-US" sz="1500" b="1" dirty="0">
                 <a:solidFill>
@@ -9022,6 +8958,13 @@
             <a:prstDash val="solid"/>
           </a:ln>
         </p:spPr>
+        <p:txBody>
+          <a:bodyPr/>
+          <a:lstStyle/>
+          <a:p>
+            <a:endParaRPr lang="en-US"/>
+          </a:p>
+        </p:txBody>
       </p:sp>
       <p:sp>
         <p:nvSpPr>
@@ -9044,7 +8987,7 @@
           <a:bodyPr wrap="square" rtlCol="0" anchor="t"/>
           <a:lstStyle/>
           <a:p>
-            <a:pPr algn="l" indent="0" marL="0">
+            <a:pPr marL="0" indent="0" algn="l">
               <a:buNone/>
             </a:pPr>
             <a:r>
@@ -9084,6 +9027,13 @@
             <a:prstDash val="solid"/>
           </a:ln>
         </p:spPr>
+        <p:txBody>
+          <a:bodyPr/>
+          <a:lstStyle/>
+          <a:p>
+            <a:endParaRPr lang="en-US"/>
+          </a:p>
+        </p:txBody>
       </p:sp>
       <p:sp>
         <p:nvSpPr>
@@ -9106,11 +9056,11 @@
           <a:bodyPr wrap="square" rtlCol="0" anchor="ctr"/>
           <a:lstStyle/>
           <a:p>
-            <a:pPr indent="0" marL="0">
+            <a:pPr marL="0" indent="0">
               <a:buNone/>
             </a:pPr>
             <a:r>
-              <a:rPr lang="en-US" sz="950" spc="100" kern="0" dirty="0">
+              <a:rPr lang="en-US" sz="950" kern="0" spc="100" dirty="0">
                 <a:solidFill>
                   <a:srgbClr val="8E948B"/>
                 </a:solidFill>
@@ -9145,7 +9095,7 @@
           <a:bodyPr wrap="square" rtlCol="0" anchor="ctr"/>
           <a:lstStyle/>
           <a:p>
-            <a:pPr algn="r" indent="0" marL="0">
+            <a:pPr marL="0" indent="0" algn="r">
               <a:buNone/>
             </a:pPr>
             <a:r>
@@ -9182,6 +9132,13 @@
           </a:solidFill>
           <a:ln/>
         </p:spPr>
+        <p:txBody>
+          <a:bodyPr/>
+          <a:lstStyle/>
+          <a:p>
+            <a:endParaRPr lang="en-US"/>
+          </a:p>
+        </p:txBody>
       </p:sp>
       <p:sp>
         <p:nvSpPr>
@@ -9209,6 +9166,13 @@
             <a:prstDash val="solid"/>
           </a:ln>
         </p:spPr>
+        <p:txBody>
+          <a:bodyPr/>
+          <a:lstStyle/>
+          <a:p>
+            <a:endParaRPr lang="en-US"/>
+          </a:p>
+        </p:txBody>
       </p:sp>
       <p:sp>
         <p:nvSpPr>
@@ -9231,14 +9195,14 @@
           <a:bodyPr wrap="square" rtlCol="0" anchor="t"/>
           <a:lstStyle/>
           <a:p>
-            <a:pPr indent="0" marL="0">
+            <a:pPr marL="0" indent="0">
               <a:lnSpc>
                 <a:spcPct val="106000"/>
               </a:lnSpc>
               <a:buNone/>
             </a:pPr>
             <a:r>
-              <a:rPr lang="en-US" sz="1000" b="1" spc="200" kern="0" dirty="0">
+              <a:rPr lang="en-US" sz="1000" b="1" kern="0" spc="200" dirty="0">
                 <a:solidFill>
                   <a:srgbClr val="86BC25"/>
                 </a:solidFill>
@@ -9249,12 +9213,6 @@
               <a:t>01
 </a:t>
             </a:r>
-            <a:pPr indent="0" marL="0">
-              <a:lnSpc>
-                <a:spcPct val="106000"/>
-              </a:lnSpc>
-              <a:buNone/>
-            </a:pPr>
             <a:r>
               <a:rPr lang="en-US" sz="1300" b="1" dirty="0">
                 <a:solidFill>
@@ -9267,12 +9225,6 @@
               <a:t>Browse &amp; search
 </a:t>
             </a:r>
-            <a:pPr indent="0" marL="0">
-              <a:lnSpc>
-                <a:spcPct val="106000"/>
-              </a:lnSpc>
-              <a:buNone/>
-            </a:pPr>
             <a:r>
               <a:rPr lang="en-US" sz="1150" dirty="0">
                 <a:solidFill>
@@ -9309,7 +9261,7 @@
           <a:bodyPr wrap="square" rtlCol="0" anchor="ctr"/>
           <a:lstStyle/>
           <a:p>
-            <a:pPr algn="ctr" indent="0" marL="0">
+            <a:pPr marL="0" indent="0" algn="ctr">
               <a:buNone/>
             </a:pPr>
             <a:r>
@@ -9353,6 +9305,13 @@
             <a:prstDash val="solid"/>
           </a:ln>
         </p:spPr>
+        <p:txBody>
+          <a:bodyPr/>
+          <a:lstStyle/>
+          <a:p>
+            <a:endParaRPr lang="en-US"/>
+          </a:p>
+        </p:txBody>
       </p:sp>
       <p:sp>
         <p:nvSpPr>
@@ -9375,14 +9334,14 @@
           <a:bodyPr wrap="square" rtlCol="0" anchor="t"/>
           <a:lstStyle/>
           <a:p>
-            <a:pPr indent="0" marL="0">
+            <a:pPr marL="0" indent="0">
               <a:lnSpc>
                 <a:spcPct val="106000"/>
               </a:lnSpc>
               <a:buNone/>
             </a:pPr>
             <a:r>
-              <a:rPr lang="en-US" sz="1000" b="1" spc="200" kern="0" dirty="0">
+              <a:rPr lang="en-US" sz="1000" b="1" kern="0" spc="200" dirty="0">
                 <a:solidFill>
                   <a:srgbClr val="86BC25"/>
                 </a:solidFill>
@@ -9393,12 +9352,6 @@
               <a:t>02
 </a:t>
             </a:r>
-            <a:pPr indent="0" marL="0">
-              <a:lnSpc>
-                <a:spcPct val="106000"/>
-              </a:lnSpc>
-              <a:buNone/>
-            </a:pPr>
             <a:r>
               <a:rPr lang="en-US" sz="1300" b="1" dirty="0">
                 <a:solidFill>
@@ -9411,12 +9364,6 @@
               <a:t>Cart &amp; checkout
 </a:t>
             </a:r>
-            <a:pPr indent="0" marL="0">
-              <a:lnSpc>
-                <a:spcPct val="106000"/>
-              </a:lnSpc>
-              <a:buNone/>
-            </a:pPr>
             <a:r>
               <a:rPr lang="en-US" sz="1150" dirty="0">
                 <a:solidFill>
@@ -9453,7 +9400,7 @@
           <a:bodyPr wrap="square" rtlCol="0" anchor="ctr"/>
           <a:lstStyle/>
           <a:p>
-            <a:pPr algn="ctr" indent="0" marL="0">
+            <a:pPr marL="0" indent="0" algn="ctr">
               <a:buNone/>
             </a:pPr>
             <a:r>
@@ -9497,6 +9444,13 @@
             <a:prstDash val="solid"/>
           </a:ln>
         </p:spPr>
+        <p:txBody>
+          <a:bodyPr/>
+          <a:lstStyle/>
+          <a:p>
+            <a:endParaRPr lang="en-US"/>
+          </a:p>
+        </p:txBody>
       </p:sp>
       <p:sp>
         <p:nvSpPr>
@@ -9519,14 +9473,14 @@
           <a:bodyPr wrap="square" rtlCol="0" anchor="t"/>
           <a:lstStyle/>
           <a:p>
-            <a:pPr indent="0" marL="0">
+            <a:pPr marL="0" indent="0">
               <a:lnSpc>
                 <a:spcPct val="106000"/>
               </a:lnSpc>
               <a:buNone/>
             </a:pPr>
             <a:r>
-              <a:rPr lang="en-US" sz="1000" b="1" spc="200" kern="0" dirty="0">
+              <a:rPr lang="en-US" sz="1000" b="1" kern="0" spc="200" dirty="0">
                 <a:solidFill>
                   <a:srgbClr val="86BC25"/>
                 </a:solidFill>
@@ -9537,12 +9491,6 @@
               <a:t>03
 </a:t>
             </a:r>
-            <a:pPr indent="0" marL="0">
-              <a:lnSpc>
-                <a:spcPct val="106000"/>
-              </a:lnSpc>
-              <a:buNone/>
-            </a:pPr>
             <a:r>
               <a:rPr lang="en-US" sz="1300" b="1" dirty="0">
                 <a:solidFill>
@@ -9555,12 +9503,6 @@
               <a:t>Order in Salesforce
 </a:t>
             </a:r>
-            <a:pPr indent="0" marL="0">
-              <a:lnSpc>
-                <a:spcPct val="106000"/>
-              </a:lnSpc>
-              <a:buNone/>
-            </a:pPr>
             <a:r>
               <a:rPr lang="en-US" sz="1150" dirty="0">
                 <a:solidFill>
@@ -9597,7 +9539,7 @@
           <a:bodyPr wrap="square" rtlCol="0" anchor="ctr"/>
           <a:lstStyle/>
           <a:p>
-            <a:pPr algn="ctr" indent="0" marL="0">
+            <a:pPr marL="0" indent="0" algn="ctr">
               <a:buNone/>
             </a:pPr>
             <a:r>
@@ -9641,6 +9583,13 @@
             <a:prstDash val="solid"/>
           </a:ln>
         </p:spPr>
+        <p:txBody>
+          <a:bodyPr/>
+          <a:lstStyle/>
+          <a:p>
+            <a:endParaRPr lang="en-US"/>
+          </a:p>
+        </p:txBody>
       </p:sp>
       <p:sp>
         <p:nvSpPr>
@@ -9663,14 +9612,14 @@
           <a:bodyPr wrap="square" rtlCol="0" anchor="t"/>
           <a:lstStyle/>
           <a:p>
-            <a:pPr indent="0" marL="0">
+            <a:pPr marL="0" indent="0">
               <a:lnSpc>
                 <a:spcPct val="106000"/>
               </a:lnSpc>
               <a:buNone/>
             </a:pPr>
             <a:r>
-              <a:rPr lang="en-US" sz="1000" b="1" spc="200" kern="0" dirty="0">
+              <a:rPr lang="en-US" sz="1000" b="1" kern="0" spc="200" dirty="0">
                 <a:solidFill>
                   <a:srgbClr val="86BC25"/>
                 </a:solidFill>
@@ -9681,12 +9630,6 @@
               <a:t>04
 </a:t>
             </a:r>
-            <a:pPr indent="0" marL="0">
-              <a:lnSpc>
-                <a:spcPct val="106000"/>
-              </a:lnSpc>
-              <a:buNone/>
-            </a:pPr>
             <a:r>
               <a:rPr lang="en-US" sz="1300" b="1" dirty="0">
                 <a:solidFill>
@@ -9699,12 +9642,6 @@
               <a:t>Merchant fulfils
 </a:t>
             </a:r>
-            <a:pPr indent="0" marL="0">
-              <a:lnSpc>
-                <a:spcPct val="106000"/>
-              </a:lnSpc>
-              <a:buNone/>
-            </a:pPr>
             <a:r>
               <a:rPr lang="en-US" sz="1150" dirty="0">
                 <a:solidFill>
@@ -9741,7 +9678,7 @@
           <a:bodyPr wrap="square" rtlCol="0" anchor="ctr"/>
           <a:lstStyle/>
           <a:p>
-            <a:pPr algn="ctr" indent="0" marL="0">
+            <a:pPr marL="0" indent="0" algn="ctr">
               <a:buNone/>
             </a:pPr>
             <a:r>
@@ -9785,6 +9722,13 @@
             <a:prstDash val="solid"/>
           </a:ln>
         </p:spPr>
+        <p:txBody>
+          <a:bodyPr/>
+          <a:lstStyle/>
+          <a:p>
+            <a:endParaRPr lang="en-US"/>
+          </a:p>
+        </p:txBody>
       </p:sp>
       <p:sp>
         <p:nvSpPr>
@@ -9807,14 +9751,14 @@
           <a:bodyPr wrap="square" rtlCol="0" anchor="t"/>
           <a:lstStyle/>
           <a:p>
-            <a:pPr indent="0" marL="0">
+            <a:pPr marL="0" indent="0">
               <a:lnSpc>
                 <a:spcPct val="106000"/>
               </a:lnSpc>
               <a:buNone/>
             </a:pPr>
             <a:r>
-              <a:rPr lang="en-US" sz="1000" b="1" spc="200" kern="0" dirty="0">
+              <a:rPr lang="en-US" sz="1000" b="1" kern="0" spc="200" dirty="0">
                 <a:solidFill>
                   <a:srgbClr val="86BC25"/>
                 </a:solidFill>
@@ -9825,12 +9769,6 @@
               <a:t>05
 </a:t>
             </a:r>
-            <a:pPr indent="0" marL="0">
-              <a:lnSpc>
-                <a:spcPct val="106000"/>
-              </a:lnSpc>
-              <a:buNone/>
-            </a:pPr>
             <a:r>
               <a:rPr lang="en-US" sz="1300" b="1" dirty="0">
                 <a:solidFill>
@@ -9843,12 +9781,6 @@
               <a:t>Storefront reflects it
 </a:t>
             </a:r>
-            <a:pPr indent="0" marL="0">
-              <a:lnSpc>
-                <a:spcPct val="106000"/>
-              </a:lnSpc>
-              <a:buNone/>
-            </a:pPr>
             <a:r>
               <a:rPr lang="en-US" sz="1150" dirty="0">
                 <a:solidFill>
@@ -9890,6 +9822,13 @@
             <a:prstDash val="solid"/>
           </a:ln>
         </p:spPr>
+        <p:txBody>
+          <a:bodyPr/>
+          <a:lstStyle/>
+          <a:p>
+            <a:endParaRPr lang="en-US"/>
+          </a:p>
+        </p:txBody>
       </p:sp>
       <p:sp>
         <p:nvSpPr>
@@ -9912,7 +9851,7 @@
           <a:bodyPr wrap="square" rtlCol="0" anchor="ctr"/>
           <a:lstStyle/>
           <a:p>
-            <a:pPr algn="ctr" indent="0" marL="0">
+            <a:pPr marL="0" indent="0" algn="ctr">
               <a:buNone/>
             </a:pPr>
             <a:r>
@@ -9956,6 +9895,13 @@
             <a:prstDash val="solid"/>
           </a:ln>
         </p:spPr>
+        <p:txBody>
+          <a:bodyPr/>
+          <a:lstStyle/>
+          <a:p>
+            <a:endParaRPr lang="en-US"/>
+          </a:p>
+        </p:txBody>
       </p:sp>
       <p:sp>
         <p:nvSpPr>
@@ -9978,7 +9924,7 @@
           <a:bodyPr wrap="square" rtlCol="0" anchor="ctr"/>
           <a:lstStyle/>
           <a:p>
-            <a:pPr algn="ctr" indent="0" marL="0">
+            <a:pPr marL="0" indent="0" algn="ctr">
               <a:buNone/>
             </a:pPr>
             <a:r>
@@ -10022,6 +9968,13 @@
             <a:prstDash val="solid"/>
           </a:ln>
         </p:spPr>
+        <p:txBody>
+          <a:bodyPr/>
+          <a:lstStyle/>
+          <a:p>
+            <a:endParaRPr lang="en-US"/>
+          </a:p>
+        </p:txBody>
       </p:sp>
       <p:sp>
         <p:nvSpPr>
@@ -10044,7 +9997,7 @@
           <a:bodyPr wrap="square" rtlCol="0" anchor="ctr"/>
           <a:lstStyle/>
           <a:p>
-            <a:pPr algn="ctr" indent="0" marL="0">
+            <a:pPr marL="0" indent="0" algn="ctr">
               <a:buNone/>
             </a:pPr>
             <a:r>
@@ -10078,6 +10031,7 @@
         <a:solidFill>
           <a:srgbClr val="0E0F11"/>
         </a:solidFill>
+        <a:effectLst/>
       </p:bgPr>
     </p:bg>
     <p:spTree>
@@ -10115,11 +10069,11 @@
           <a:bodyPr wrap="square" rtlCol="0" anchor="ctr"/>
           <a:lstStyle/>
           <a:p>
-            <a:pPr indent="0" marL="0">
+            <a:pPr marL="0" indent="0">
               <a:buNone/>
             </a:pPr>
             <a:r>
-              <a:rPr lang="en-US" sz="1100" b="1" spc="300" kern="0" dirty="0">
+              <a:rPr lang="en-US" sz="1100" b="1" kern="0" spc="300" dirty="0">
                 <a:solidFill>
                   <a:srgbClr val="86BC25"/>
                 </a:solidFill>
@@ -10154,7 +10108,7 @@
           <a:bodyPr wrap="square" rtlCol="0" anchor="ctr"/>
           <a:lstStyle/>
           <a:p>
-            <a:pPr algn="r" indent="0" marL="0">
+            <a:pPr marL="0" indent="0" algn="r">
               <a:buNone/>
             </a:pPr>
             <a:r>
@@ -10168,9 +10122,6 @@
               </a:rPr>
               <a:t>Deloitte</a:t>
             </a:r>
-            <a:pPr algn="r" indent="0" marL="0">
-              <a:buNone/>
-            </a:pPr>
             <a:r>
               <a:rPr lang="en-US" sz="1500" b="1" dirty="0">
                 <a:solidFill>
@@ -10208,6 +10159,13 @@
             <a:prstDash val="solid"/>
           </a:ln>
         </p:spPr>
+        <p:txBody>
+          <a:bodyPr/>
+          <a:lstStyle/>
+          <a:p>
+            <a:endParaRPr lang="en-US"/>
+          </a:p>
+        </p:txBody>
       </p:sp>
       <p:sp>
         <p:nvSpPr>
@@ -10230,7 +10188,7 @@
           <a:bodyPr wrap="square" rtlCol="0" anchor="t"/>
           <a:lstStyle/>
           <a:p>
-            <a:pPr algn="l" indent="0" marL="0">
+            <a:pPr marL="0" indent="0" algn="l">
               <a:buNone/>
             </a:pPr>
             <a:r>
@@ -10270,6 +10228,13 @@
             <a:prstDash val="solid"/>
           </a:ln>
         </p:spPr>
+        <p:txBody>
+          <a:bodyPr/>
+          <a:lstStyle/>
+          <a:p>
+            <a:endParaRPr lang="en-US"/>
+          </a:p>
+        </p:txBody>
       </p:sp>
       <p:sp>
         <p:nvSpPr>
@@ -10292,11 +10257,11 @@
           <a:bodyPr wrap="square" rtlCol="0" anchor="ctr"/>
           <a:lstStyle/>
           <a:p>
-            <a:pPr indent="0" marL="0">
+            <a:pPr marL="0" indent="0">
               <a:buNone/>
             </a:pPr>
             <a:r>
-              <a:rPr lang="en-US" sz="950" spc="100" kern="0" dirty="0">
+              <a:rPr lang="en-US" sz="950" kern="0" spc="100" dirty="0">
                 <a:solidFill>
                   <a:srgbClr val="8E948B"/>
                 </a:solidFill>
@@ -10331,7 +10296,7 @@
           <a:bodyPr wrap="square" rtlCol="0" anchor="ctr"/>
           <a:lstStyle/>
           <a:p>
-            <a:pPr algn="r" indent="0" marL="0">
+            <a:pPr marL="0" indent="0" algn="r">
               <a:buNone/>
             </a:pPr>
             <a:r>
@@ -10368,6 +10333,13 @@
           </a:solidFill>
           <a:ln/>
         </p:spPr>
+        <p:txBody>
+          <a:bodyPr/>
+          <a:lstStyle/>
+          <a:p>
+            <a:endParaRPr lang="en-US"/>
+          </a:p>
+        </p:txBody>
       </p:sp>
       <p:sp>
         <p:nvSpPr>
@@ -10395,6 +10367,13 @@
             <a:prstDash val="solid"/>
           </a:ln>
         </p:spPr>
+        <p:txBody>
+          <a:bodyPr/>
+          <a:lstStyle/>
+          <a:p>
+            <a:endParaRPr lang="en-US"/>
+          </a:p>
+        </p:txBody>
       </p:sp>
       <p:sp>
         <p:nvSpPr>
@@ -10417,14 +10396,14 @@
           <a:bodyPr wrap="square" rtlCol="0" anchor="t"/>
           <a:lstStyle/>
           <a:p>
-            <a:pPr indent="0" marL="0">
+            <a:pPr marL="0" indent="0">
               <a:lnSpc>
                 <a:spcPct val="106000"/>
               </a:lnSpc>
               <a:buNone/>
             </a:pPr>
             <a:r>
-              <a:rPr lang="en-US" sz="1000" b="1" spc="200" kern="0" dirty="0">
+              <a:rPr lang="en-US" sz="1000" b="1" kern="0" spc="200" dirty="0">
                 <a:solidFill>
                   <a:srgbClr val="86BC25"/>
                 </a:solidFill>
@@ -10432,16 +10411,29 @@
                 <a:ea typeface="Arial" pitchFamily="34" charset="-122"/>
                 <a:cs typeface="Arial" pitchFamily="34" charset="-120"/>
               </a:rPr>
-              <a:t>CUSTOMERS
-</a:t>
-            </a:r>
-            <a:pPr indent="0" marL="0">
+              <a:t>CUSTOMERS</a:t>
+            </a:r>
+          </a:p>
+          <a:p>
+            <a:pPr marL="0" indent="0">
               <a:lnSpc>
                 <a:spcPct val="106000"/>
               </a:lnSpc>
               <a:buNone/>
             </a:pPr>
             <a:r>
+              <a:rPr lang="en-US" sz="1000" b="1" kern="0" spc="200" dirty="0">
+                <a:solidFill>
+                  <a:srgbClr val="86BC25"/>
+                </a:solidFill>
+                <a:latin typeface="Arial" pitchFamily="34" charset="0"/>
+                <a:ea typeface="Arial" pitchFamily="34" charset="-122"/>
+                <a:cs typeface="Arial" pitchFamily="34" charset="-120"/>
+              </a:rPr>
+              <a:t>
+</a:t>
+            </a:r>
+            <a:r>
               <a:rPr lang="en-US" sz="2000" b="1" dirty="0">
                 <a:solidFill>
                   <a:srgbClr val="F3F4F1"/>
@@ -10453,12 +10445,6 @@
               <a:t>Person Accounts
 </a:t>
             </a:r>
-            <a:pPr indent="0" marL="0">
-              <a:lnSpc>
-                <a:spcPct val="106000"/>
-              </a:lnSpc>
-              <a:buNone/>
-            </a:pPr>
             <a:r>
               <a:rPr lang="en-US" sz="1150" dirty="0">
                 <a:solidFill>
@@ -10500,6 +10486,13 @@
             <a:prstDash val="solid"/>
           </a:ln>
         </p:spPr>
+        <p:txBody>
+          <a:bodyPr/>
+          <a:lstStyle/>
+          <a:p>
+            <a:endParaRPr lang="en-US"/>
+          </a:p>
+        </p:txBody>
       </p:sp>
       <p:sp>
         <p:nvSpPr>
@@ -10522,14 +10515,14 @@
           <a:bodyPr wrap="square" rtlCol="0" anchor="t"/>
           <a:lstStyle/>
           <a:p>
-            <a:pPr indent="0" marL="0">
+            <a:pPr marL="0" indent="0">
               <a:lnSpc>
                 <a:spcPct val="106000"/>
               </a:lnSpc>
               <a:buNone/>
             </a:pPr>
             <a:r>
-              <a:rPr lang="en-US" sz="1000" b="1" spc="200" kern="0" dirty="0">
+              <a:rPr lang="en-US" sz="1000" b="1" kern="0" spc="200" dirty="0">
                 <a:solidFill>
                   <a:srgbClr val="86BC25"/>
                 </a:solidFill>
@@ -10537,16 +10530,29 @@
                 <a:ea typeface="Arial" pitchFamily="34" charset="-122"/>
                 <a:cs typeface="Arial" pitchFamily="34" charset="-120"/>
               </a:rPr>
-              <a:t>LIVE UPDATES
-</a:t>
-            </a:r>
-            <a:pPr indent="0" marL="0">
+              <a:t>LIVE UPDATES</a:t>
+            </a:r>
+          </a:p>
+          <a:p>
+            <a:pPr marL="0" indent="0">
               <a:lnSpc>
                 <a:spcPct val="106000"/>
               </a:lnSpc>
               <a:buNone/>
             </a:pPr>
             <a:r>
+              <a:rPr lang="en-US" sz="1000" b="1" kern="0" spc="200" dirty="0">
+                <a:solidFill>
+                  <a:srgbClr val="86BC25"/>
+                </a:solidFill>
+                <a:latin typeface="Arial" pitchFamily="34" charset="0"/>
+                <a:ea typeface="Arial" pitchFamily="34" charset="-122"/>
+                <a:cs typeface="Arial" pitchFamily="34" charset="-120"/>
+              </a:rPr>
+              <a:t>
+</a:t>
+            </a:r>
+            <a:r>
               <a:rPr lang="en-US" sz="2000" b="1" dirty="0">
                 <a:solidFill>
                   <a:srgbClr val="F3F4F1"/>
@@ -10558,12 +10564,6 @@
               <a:t>Change Data Capture → the browser
 </a:t>
             </a:r>
-            <a:pPr indent="0" marL="0">
-              <a:lnSpc>
-                <a:spcPct val="106000"/>
-              </a:lnSpc>
-              <a:buNone/>
-            </a:pPr>
             <a:r>
               <a:rPr lang="en-US" sz="1150" dirty="0">
                 <a:solidFill>
@@ -10595,6 +10595,7 @@
         <a:solidFill>
           <a:srgbClr val="0E0F11"/>
         </a:solidFill>
+        <a:effectLst/>
       </p:bgPr>
     </p:bg>
     <p:spTree>
@@ -10632,11 +10633,11 @@
           <a:bodyPr wrap="square" rtlCol="0" anchor="ctr"/>
           <a:lstStyle/>
           <a:p>
-            <a:pPr indent="0" marL="0">
+            <a:pPr marL="0" indent="0">
               <a:buNone/>
             </a:pPr>
             <a:r>
-              <a:rPr lang="en-US" sz="1100" b="1" spc="300" kern="0" dirty="0">
+              <a:rPr lang="en-US" sz="1100" b="1" kern="0" spc="300" dirty="0">
                 <a:solidFill>
                   <a:srgbClr val="86BC25"/>
                 </a:solidFill>
@@ -10671,7 +10672,7 @@
           <a:bodyPr wrap="square" rtlCol="0" anchor="ctr"/>
           <a:lstStyle/>
           <a:p>
-            <a:pPr algn="r" indent="0" marL="0">
+            <a:pPr marL="0" indent="0" algn="r">
               <a:buNone/>
             </a:pPr>
             <a:r>
@@ -10685,9 +10686,6 @@
               </a:rPr>
               <a:t>Deloitte</a:t>
             </a:r>
-            <a:pPr algn="r" indent="0" marL="0">
-              <a:buNone/>
-            </a:pPr>
             <a:r>
               <a:rPr lang="en-US" sz="1500" b="1" dirty="0">
                 <a:solidFill>
@@ -10725,6 +10723,13 @@
             <a:prstDash val="solid"/>
           </a:ln>
         </p:spPr>
+        <p:txBody>
+          <a:bodyPr/>
+          <a:lstStyle/>
+          <a:p>
+            <a:endParaRPr lang="en-US"/>
+          </a:p>
+        </p:txBody>
       </p:sp>
       <p:sp>
         <p:nvSpPr>
@@ -10747,7 +10752,7 @@
           <a:bodyPr wrap="square" rtlCol="0" anchor="t"/>
           <a:lstStyle/>
           <a:p>
-            <a:pPr algn="l" indent="0" marL="0">
+            <a:pPr marL="0" indent="0" algn="l">
               <a:buNone/>
             </a:pPr>
             <a:r>
@@ -10787,6 +10792,13 @@
             <a:prstDash val="solid"/>
           </a:ln>
         </p:spPr>
+        <p:txBody>
+          <a:bodyPr/>
+          <a:lstStyle/>
+          <a:p>
+            <a:endParaRPr lang="en-US"/>
+          </a:p>
+        </p:txBody>
       </p:sp>
       <p:sp>
         <p:nvSpPr>
@@ -10809,11 +10821,11 @@
           <a:bodyPr wrap="square" rtlCol="0" anchor="ctr"/>
           <a:lstStyle/>
           <a:p>
-            <a:pPr indent="0" marL="0">
+            <a:pPr marL="0" indent="0">
               <a:buNone/>
             </a:pPr>
             <a:r>
-              <a:rPr lang="en-US" sz="950" spc="100" kern="0" dirty="0">
+              <a:rPr lang="en-US" sz="950" kern="0" spc="100" dirty="0">
                 <a:solidFill>
                   <a:srgbClr val="8E948B"/>
                 </a:solidFill>
@@ -10848,7 +10860,7 @@
           <a:bodyPr wrap="square" rtlCol="0" anchor="ctr"/>
           <a:lstStyle/>
           <a:p>
-            <a:pPr algn="r" indent="0" marL="0">
+            <a:pPr marL="0" indent="0" algn="r">
               <a:buNone/>
             </a:pPr>
             <a:r>
@@ -10885,6 +10897,13 @@
           </a:solidFill>
           <a:ln/>
         </p:spPr>
+        <p:txBody>
+          <a:bodyPr/>
+          <a:lstStyle/>
+          <a:p>
+            <a:endParaRPr lang="en-US"/>
+          </a:p>
+        </p:txBody>
       </p:sp>
       <p:graphicFrame>
         <p:nvGraphicFramePr>
@@ -10895,24 +10914,48 @@
           <p:nvPr>
             <p:extLst>
               <p:ext uri="{D42A27DB-BD31-4B8C-83A1-F6EECF244321}">
-                <p14:modId xmlns:p14="http://schemas.microsoft.com/office/powerpoint/2010/main" val="1579011935"/>
+                <p14:modId xmlns:p14="http://schemas.microsoft.com/office/powerpoint/2010/main" val="1160499966"/>
               </p:ext>
             </p:extLst>
           </p:nvPr>
         </p:nvGraphicFramePr>
         <p:xfrm>
           <a:off x="566928" y="2103120"/>
-          <a:ext cx="11057839" cy="914400"/>
+          <a:ext cx="11057840" cy="3474720"/>
         </p:xfrm>
         <a:graphic>
           <a:graphicData uri="http://schemas.openxmlformats.org/drawingml/2006/table">
             <a:tbl>
               <a:tblPr/>
               <a:tblGrid>
-                <a:gridCol w="2764460"/>
-                <a:gridCol w="2764460"/>
-                <a:gridCol w="2764460"/>
-                <a:gridCol w="2764460"/>
+                <a:gridCol w="2764460">
+                  <a:extLst>
+                    <a:ext uri="{9D8B030D-6E8A-4147-A177-3AD203B41FA5}">
+                      <a16:colId xmlns:a16="http://schemas.microsoft.com/office/drawing/2014/main" val="20000"/>
+                    </a:ext>
+                  </a:extLst>
+                </a:gridCol>
+                <a:gridCol w="2764460">
+                  <a:extLst>
+                    <a:ext uri="{9D8B030D-6E8A-4147-A177-3AD203B41FA5}">
+                      <a16:colId xmlns:a16="http://schemas.microsoft.com/office/drawing/2014/main" val="20001"/>
+                    </a:ext>
+                  </a:extLst>
+                </a:gridCol>
+                <a:gridCol w="2764460">
+                  <a:extLst>
+                    <a:ext uri="{9D8B030D-6E8A-4147-A177-3AD203B41FA5}">
+                      <a16:colId xmlns:a16="http://schemas.microsoft.com/office/drawing/2014/main" val="20002"/>
+                    </a:ext>
+                  </a:extLst>
+                </a:gridCol>
+                <a:gridCol w="2764460">
+                  <a:extLst>
+                    <a:ext uri="{9D8B030D-6E8A-4147-A177-3AD203B41FA5}">
+                      <a16:colId xmlns:a16="http://schemas.microsoft.com/office/drawing/2014/main" val="20003"/>
+                    </a:ext>
+                  </a:extLst>
+                </a:gridCol>
               </a:tblGrid>
               <a:tr h="868680">
                 <a:tc>
@@ -10920,7 +10963,7 @@
                     <a:bodyPr/>
                     <a:lstStyle/>
                     <a:p>
-                      <a:pPr indent="0" marL="0">
+                      <a:pPr marL="0" indent="0">
                         <a:buNone/>
                       </a:pPr>
                       <a:r>
@@ -10935,9 +10978,6 @@
                         <a:t>▸ Discovery &amp; search
 </a:t>
                       </a:r>
-                      <a:pPr indent="0" marL="0">
-                        <a:buNone/>
-                      </a:pPr>
                       <a:r>
                         <a:rPr lang="en-US" sz="950" dirty="0">
                           <a:solidFill>
@@ -11003,7 +11043,7 @@
                     <a:bodyPr/>
                     <a:lstStyle/>
                     <a:p>
-                      <a:pPr indent="0" marL="0">
+                      <a:pPr marL="0" indent="0">
                         <a:buNone/>
                       </a:pPr>
                       <a:r>
@@ -11018,9 +11058,6 @@
                         <a:t>▸ Cart &amp; checkout
 </a:t>
                       </a:r>
-                      <a:pPr indent="0" marL="0">
-                        <a:buNone/>
-                      </a:pPr>
                       <a:r>
                         <a:rPr lang="en-US" sz="950" dirty="0">
                           <a:solidFill>
@@ -11086,7 +11123,7 @@
                     <a:bodyPr/>
                     <a:lstStyle/>
                     <a:p>
-                      <a:pPr indent="0" marL="0">
+                      <a:pPr marL="0" indent="0">
                         <a:buNone/>
                       </a:pPr>
                       <a:r>
@@ -11101,9 +11138,6 @@
                         <a:t>▸ Promo codes
 </a:t>
                       </a:r>
-                      <a:pPr indent="0" marL="0">
-                        <a:buNone/>
-                      </a:pPr>
                       <a:r>
                         <a:rPr lang="en-US" sz="950" dirty="0">
                           <a:solidFill>
@@ -11169,7 +11203,7 @@
                     <a:bodyPr/>
                     <a:lstStyle/>
                     <a:p>
-                      <a:pPr indent="0" marL="0">
+                      <a:pPr marL="0" indent="0">
                         <a:buNone/>
                       </a:pPr>
                       <a:r>
@@ -11184,9 +11218,6 @@
                         <a:t>▸ Payments
 </a:t>
                       </a:r>
-                      <a:pPr indent="0" marL="0">
-                        <a:buNone/>
-                      </a:pPr>
                       <a:r>
                         <a:rPr lang="en-US" sz="950" dirty="0">
                           <a:solidFill>
@@ -11247,6 +11278,11 @@
                     </a:solidFill>
                   </a:tcPr>
                 </a:tc>
+                <a:extLst>
+                  <a:ext uri="{0D108BD9-81ED-4DB2-BD59-A6C34878D82A}">
+                    <a16:rowId xmlns:a16="http://schemas.microsoft.com/office/drawing/2014/main" val="10000"/>
+                  </a:ext>
+                </a:extLst>
               </a:tr>
               <a:tr h="868680">
                 <a:tc>
@@ -11254,7 +11290,7 @@
                     <a:bodyPr/>
                     <a:lstStyle/>
                     <a:p>
-                      <a:pPr indent="0" marL="0">
+                      <a:pPr marL="0" indent="0">
                         <a:buNone/>
                       </a:pPr>
                       <a:r>
@@ -11269,9 +11305,6 @@
                         <a:t>▸ Order history
 </a:t>
                       </a:r>
-                      <a:pPr indent="0" marL="0">
-                        <a:buNone/>
-                      </a:pPr>
                       <a:r>
                         <a:rPr lang="en-US" sz="950" dirty="0">
                           <a:solidFill>
@@ -11337,7 +11370,7 @@
                     <a:bodyPr/>
                     <a:lstStyle/>
                     <a:p>
-                      <a:pPr indent="0" marL="0">
+                      <a:pPr marL="0" indent="0">
                         <a:buNone/>
                       </a:pPr>
                       <a:r>
@@ -11352,9 +11385,6 @@
                         <a:t>▸ One-click reorder
 </a:t>
                       </a:r>
-                      <a:pPr indent="0" marL="0">
-                        <a:buNone/>
-                      </a:pPr>
                       <a:r>
                         <a:rPr lang="en-US" sz="950" dirty="0">
                           <a:solidFill>
@@ -11420,7 +11450,7 @@
                     <a:bodyPr/>
                     <a:lstStyle/>
                     <a:p>
-                      <a:pPr indent="0" marL="0">
+                      <a:pPr marL="0" indent="0">
                         <a:buNone/>
                       </a:pPr>
                       <a:r>
@@ -11435,9 +11465,6 @@
                         <a:t>▸ Reviews &amp; ratings
 </a:t>
                       </a:r>
-                      <a:pPr indent="0" marL="0">
-                        <a:buNone/>
-                      </a:pPr>
                       <a:r>
                         <a:rPr lang="en-US" sz="950" dirty="0">
                           <a:solidFill>
@@ -11503,7 +11530,7 @@
                     <a:bodyPr/>
                     <a:lstStyle/>
                     <a:p>
-                      <a:pPr indent="0" marL="0">
+                      <a:pPr marL="0" indent="0">
                         <a:buNone/>
                       </a:pPr>
                       <a:r>
@@ -11518,9 +11545,6 @@
                         <a:t>▸ Wishlist
 </a:t>
                       </a:r>
-                      <a:pPr indent="0" marL="0">
-                        <a:buNone/>
-                      </a:pPr>
                       <a:r>
                         <a:rPr lang="en-US" sz="950" dirty="0">
                           <a:solidFill>
@@ -11581,6 +11605,11 @@
                     </a:solidFill>
                   </a:tcPr>
                 </a:tc>
+                <a:extLst>
+                  <a:ext uri="{0D108BD9-81ED-4DB2-BD59-A6C34878D82A}">
+                    <a16:rowId xmlns:a16="http://schemas.microsoft.com/office/drawing/2014/main" val="10001"/>
+                  </a:ext>
+                </a:extLst>
               </a:tr>
               <a:tr h="868680">
                 <a:tc>
@@ -11588,7 +11617,7 @@
                     <a:bodyPr/>
                     <a:lstStyle/>
                     <a:p>
-                      <a:pPr indent="0" marL="0">
+                      <a:pPr marL="0" indent="0">
                         <a:buNone/>
                       </a:pPr>
                       <a:r>
@@ -11603,9 +11632,6 @@
                         <a:t>▸ Saved addresses
 </a:t>
                       </a:r>
-                      <a:pPr indent="0" marL="0">
-                        <a:buNone/>
-                      </a:pPr>
                       <a:r>
                         <a:rPr lang="en-US" sz="950" dirty="0">
                           <a:solidFill>
@@ -11671,7 +11697,7 @@
                     <a:bodyPr/>
                     <a:lstStyle/>
                     <a:p>
-                      <a:pPr indent="0" marL="0">
+                      <a:pPr marL="0" indent="0">
                         <a:buNone/>
                       </a:pPr>
                       <a:r>
@@ -11686,9 +11712,6 @@
                         <a:t>▸ Live order tracking
 </a:t>
                       </a:r>
-                      <a:pPr indent="0" marL="0">
-                        <a:buNone/>
-                      </a:pPr>
                       <a:r>
                         <a:rPr lang="en-US" sz="950" dirty="0">
                           <a:solidFill>
@@ -11754,7 +11777,7 @@
                     <a:bodyPr/>
                     <a:lstStyle/>
                     <a:p>
-                      <a:pPr indent="0" marL="0">
+                      <a:pPr marL="0" indent="0">
                         <a:buNone/>
                       </a:pPr>
                       <a:r>
@@ -11769,9 +11792,6 @@
                         <a:t>▸ Support tickets
 </a:t>
                       </a:r>
-                      <a:pPr indent="0" marL="0">
-                        <a:buNone/>
-                      </a:pPr>
                       <a:r>
                         <a:rPr lang="en-US" sz="950" dirty="0">
                           <a:solidFill>
@@ -11837,7 +11857,7 @@
                     <a:bodyPr/>
                     <a:lstStyle/>
                     <a:p>
-                      <a:pPr indent="0" marL="0">
+                      <a:pPr marL="0" indent="0">
                         <a:buNone/>
                       </a:pPr>
                       <a:r>
@@ -11852,9 +11872,6 @@
                         <a:t>▸ Guest tracking
 </a:t>
                       </a:r>
-                      <a:pPr indent="0" marL="0">
-                        <a:buNone/>
-                      </a:pPr>
                       <a:r>
                         <a:rPr lang="en-US" sz="950" dirty="0">
                           <a:solidFill>
@@ -11915,6 +11932,11 @@
                     </a:solidFill>
                   </a:tcPr>
                 </a:tc>
+                <a:extLst>
+                  <a:ext uri="{0D108BD9-81ED-4DB2-BD59-A6C34878D82A}">
+                    <a16:rowId xmlns:a16="http://schemas.microsoft.com/office/drawing/2014/main" val="10002"/>
+                  </a:ext>
+                </a:extLst>
               </a:tr>
               <a:tr h="868680">
                 <a:tc>
@@ -11922,7 +11944,7 @@
                     <a:bodyPr/>
                     <a:lstStyle/>
                     <a:p>
-                      <a:pPr indent="0" marL="0">
+                      <a:pPr marL="0" indent="0">
                         <a:buNone/>
                       </a:pPr>
                       <a:r>
@@ -11937,9 +11959,6 @@
                         <a:t>▸ Light / dark theme
 </a:t>
                       </a:r>
-                      <a:pPr indent="0" marL="0">
-                        <a:buNone/>
-                      </a:pPr>
                       <a:r>
                         <a:rPr lang="en-US" sz="950" dirty="0">
                           <a:solidFill>
@@ -12005,7 +12024,7 @@
                     <a:bodyPr/>
                     <a:lstStyle/>
                     <a:p>
-                      <a:pPr indent="0" marL="0">
+                      <a:pPr marL="0" indent="0">
                         <a:buNone/>
                       </a:pPr>
                       <a:r>
@@ -12020,9 +12039,6 @@
                         <a:t>▸ SEO + structured data
 </a:t>
                       </a:r>
-                      <a:pPr indent="0" marL="0">
-                        <a:buNone/>
-                      </a:pPr>
                       <a:r>
                         <a:rPr lang="en-US" sz="950" dirty="0">
                           <a:solidFill>
@@ -12088,7 +12104,7 @@
                     <a:bodyPr/>
                     <a:lstStyle/>
                     <a:p>
-                      <a:pPr indent="0" marL="0">
+                      <a:pPr marL="0" indent="0">
                         <a:buNone/>
                       </a:pPr>
                       <a:r>
@@ -12103,9 +12119,6 @@
                         <a:t>▸ Accessibility
 </a:t>
                       </a:r>
-                      <a:pPr indent="0" marL="0">
-                        <a:buNone/>
-                      </a:pPr>
                       <a:r>
                         <a:rPr lang="en-US" sz="950" dirty="0">
                           <a:solidFill>
@@ -12171,7 +12184,7 @@
                     <a:bodyPr/>
                     <a:lstStyle/>
                     <a:p>
-                      <a:pPr indent="0" marL="0">
+                      <a:pPr marL="0" indent="0">
                         <a:buNone/>
                       </a:pPr>
                       <a:r>
@@ -12186,9 +12199,6 @@
                         <a:t>▸ End-to-end tests
 </a:t>
                       </a:r>
-                      <a:pPr indent="0" marL="0">
-                        <a:buNone/>
-                      </a:pPr>
                       <a:r>
                         <a:rPr lang="en-US" sz="950" dirty="0">
                           <a:solidFill>
@@ -12249,6 +12259,11 @@
                     </a:solidFill>
                   </a:tcPr>
                 </a:tc>
+                <a:extLst>
+                  <a:ext uri="{0D108BD9-81ED-4DB2-BD59-A6C34878D82A}">
+                    <a16:rowId xmlns:a16="http://schemas.microsoft.com/office/drawing/2014/main" val="10003"/>
+                  </a:ext>
+                </a:extLst>
               </a:tr>
             </a:tbl>
           </a:graphicData>
@@ -12555,4 +12570,325 @@
     </a:ext>
   </a:extLst>
 </a:theme>
+</file>
+
+<file path=ppt/theme/theme2.xml><?xml version="1.0" encoding="utf-8"?>
+<a:theme xmlns:a="http://schemas.openxmlformats.org/drawingml/2006/main" name="Office Theme">
+  <a:themeElements>
+    <a:clrScheme name="Office">
+      <a:dk1>
+        <a:sysClr val="windowText" lastClr="000000"/>
+      </a:dk1>
+      <a:lt1>
+        <a:sysClr val="window" lastClr="FFFFFF"/>
+      </a:lt1>
+      <a:dk2>
+        <a:srgbClr val="0E2841"/>
+      </a:dk2>
+      <a:lt2>
+        <a:srgbClr val="E8E8E8"/>
+      </a:lt2>
+      <a:accent1>
+        <a:srgbClr val="156082"/>
+      </a:accent1>
+      <a:accent2>
+        <a:srgbClr val="E97132"/>
+      </a:accent2>
+      <a:accent3>
+        <a:srgbClr val="196B24"/>
+      </a:accent3>
+      <a:accent4>
+        <a:srgbClr val="0F9ED5"/>
+      </a:accent4>
+      <a:accent5>
+        <a:srgbClr val="A02B93"/>
+      </a:accent5>
+      <a:accent6>
+        <a:srgbClr val="4EA72E"/>
+      </a:accent6>
+      <a:hlink>
+        <a:srgbClr val="467886"/>
+      </a:hlink>
+      <a:folHlink>
+        <a:srgbClr val="96607D"/>
+      </a:folHlink>
+    </a:clrScheme>
+    <a:fontScheme name="Office">
+      <a:majorFont>
+        <a:latin typeface="Aptos Display" panose="02110004020202020204"/>
+        <a:ea typeface=""/>
+        <a:cs typeface=""/>
+        <a:font script="Jpan" typeface="游ゴシック Light"/>
+        <a:font script="Hang" typeface="맑은 고딕"/>
+        <a:font script="Hans" typeface="等线 Light"/>
+        <a:font script="Hant" typeface="新細明體"/>
+        <a:font script="Arab" typeface="Times New Roman"/>
+        <a:font script="Hebr" typeface="Times New Roman"/>
+        <a:font script="Thai" typeface="Angsana New"/>
+        <a:font script="Ethi" typeface="Nyala"/>
+        <a:font script="Beng" typeface="Vrinda"/>
+        <a:font script="Gujr" typeface="Shruti"/>
+        <a:font script="Khmr" typeface="MoolBoran"/>
+        <a:font script="Knda" typeface="Tunga"/>
+        <a:font script="Guru" typeface="Raavi"/>
+        <a:font script="Cans" typeface="Euphemia"/>
+        <a:font script="Cher" typeface="Plantagenet Cherokee"/>
+        <a:font script="Yiii" typeface="Microsoft Yi Baiti"/>
+        <a:font script="Tibt" typeface="Microsoft Himalaya"/>
+        <a:font script="Thaa" typeface="MV Boli"/>
+        <a:font script="Deva" typeface="Mangal"/>
+        <a:font script="Telu" typeface="Gautami"/>
+        <a:font script="Taml" typeface="Latha"/>
+        <a:font script="Syrc" typeface="Estrangelo Edessa"/>
+        <a:font script="Orya" typeface="Kalinga"/>
+        <a:font script="Mlym" typeface="Kartika"/>
+        <a:font script="Laoo" typeface="DokChampa"/>
+        <a:font script="Sinh" typeface="Iskoola Pota"/>
+        <a:font script="Mong" typeface="Mongolian Baiti"/>
+        <a:font script="Viet" typeface="Times New Roman"/>
+        <a:font script="Uigh" typeface="Microsoft Uighur"/>
+        <a:font script="Geor" typeface="Sylfaen"/>
+        <a:font script="Armn" typeface="Arial"/>
+        <a:font script="Bugi" typeface="Leelawadee UI"/>
+        <a:font script="Bopo" typeface="Microsoft JhengHei"/>
+        <a:font script="Java" typeface="Javanese Text"/>
+        <a:font script="Lisu" typeface="Segoe UI"/>
+        <a:font script="Mymr" typeface="Myanmar Text"/>
+        <a:font script="Nkoo" typeface="Ebrima"/>
+        <a:font script="Olck" typeface="Nirmala UI"/>
+        <a:font script="Osma" typeface="Ebrima"/>
+        <a:font script="Phag" typeface="Phagspa"/>
+        <a:font script="Syrn" typeface="Estrangelo Edessa"/>
+        <a:font script="Syrj" typeface="Estrangelo Edessa"/>
+        <a:font script="Syre" typeface="Estrangelo Edessa"/>
+        <a:font script="Sora" typeface="Nirmala UI"/>
+        <a:font script="Tale" typeface="Microsoft Tai Le"/>
+        <a:font script="Talu" typeface="Microsoft New Tai Lue"/>
+        <a:font script="Tfng" typeface="Ebrima"/>
+      </a:majorFont>
+      <a:minorFont>
+        <a:latin typeface="Aptos" panose="02110004020202020204"/>
+        <a:ea typeface=""/>
+        <a:cs typeface=""/>
+        <a:font script="Jpan" typeface="游ゴシック"/>
+        <a:font script="Hang" typeface="맑은 고딕"/>
+        <a:font script="Hans" typeface="等线"/>
+        <a:font script="Hant" typeface="新細明體"/>
+        <a:font script="Arab" typeface="Arial"/>
+        <a:font script="Hebr" typeface="Arial"/>
+        <a:font script="Thai" typeface="Cordia New"/>
+        <a:font script="Ethi" typeface="Nyala"/>
+        <a:font script="Beng" typeface="Vrinda"/>
+        <a:font script="Gujr" typeface="Shruti"/>
+        <a:font script="Khmr" typeface="DaunPenh"/>
+        <a:font script="Knda" typeface="Tunga"/>
+        <a:font script="Guru" typeface="Raavi"/>
+        <a:font script="Cans" typeface="Euphemia"/>
+        <a:font script="Cher" typeface="Plantagenet Cherokee"/>
+        <a:font script="Yiii" typeface="Microsoft Yi Baiti"/>
+        <a:font script="Tibt" typeface="Microsoft Himalaya"/>
+        <a:font script="Thaa" typeface="MV Boli"/>
+        <a:font script="Deva" typeface="Mangal"/>
+        <a:font script="Telu" typeface="Gautami"/>
+        <a:font script="Taml" typeface="Latha"/>
+        <a:font script="Syrc" typeface="Estrangelo Edessa"/>
+        <a:font script="Orya" typeface="Kalinga"/>
+        <a:font script="Mlym" typeface="Kartika"/>
+        <a:font script="Laoo" typeface="DokChampa"/>
+        <a:font script="Sinh" typeface="Iskoola Pota"/>
+        <a:font script="Mong" typeface="Mongolian Baiti"/>
+        <a:font script="Viet" typeface="Arial"/>
+        <a:font script="Uigh" typeface="Microsoft Uighur"/>
+        <a:font script="Geor" typeface="Sylfaen"/>
+        <a:font script="Armn" typeface="Arial"/>
+        <a:font script="Bugi" typeface="Leelawadee UI"/>
+        <a:font script="Bopo" typeface="Microsoft JhengHei"/>
+        <a:font script="Java" typeface="Javanese Text"/>
+        <a:font script="Lisu" typeface="Segoe UI"/>
+        <a:font script="Mymr" typeface="Myanmar Text"/>
+        <a:font script="Nkoo" typeface="Ebrima"/>
+        <a:font script="Olck" typeface="Nirmala UI"/>
+        <a:font script="Osma" typeface="Ebrima"/>
+        <a:font script="Phag" typeface="Phagspa"/>
+        <a:font script="Syrn" typeface="Estrangelo Edessa"/>
+        <a:font script="Syrj" typeface="Estrangelo Edessa"/>
+        <a:font script="Syre" typeface="Estrangelo Edessa"/>
+        <a:font script="Sora" typeface="Nirmala UI"/>
+        <a:font script="Tale" typeface="Microsoft Tai Le"/>
+        <a:font script="Talu" typeface="Microsoft New Tai Lue"/>
+        <a:font script="Tfng" typeface="Ebrima"/>
+      </a:minorFont>
+    </a:fontScheme>
+    <a:fmtScheme name="Office">
+      <a:fillStyleLst>
+        <a:solidFill>
+          <a:schemeClr val="phClr"/>
+        </a:solidFill>
+        <a:gradFill rotWithShape="1">
+          <a:gsLst>
+            <a:gs pos="0">
+              <a:schemeClr val="phClr">
+                <a:lumMod val="110000"/>
+                <a:satMod val="105000"/>
+                <a:tint val="67000"/>
+              </a:schemeClr>
+            </a:gs>
+            <a:gs pos="50000">
+              <a:schemeClr val="phClr">
+                <a:lumMod val="105000"/>
+                <a:satMod val="103000"/>
+                <a:tint val="73000"/>
+              </a:schemeClr>
+            </a:gs>
+            <a:gs pos="100000">
+              <a:schemeClr val="phClr">
+                <a:lumMod val="105000"/>
+                <a:satMod val="109000"/>
+                <a:tint val="81000"/>
+              </a:schemeClr>
+            </a:gs>
+          </a:gsLst>
+          <a:lin ang="5400000" scaled="0"/>
+        </a:gradFill>
+        <a:gradFill rotWithShape="1">
+          <a:gsLst>
+            <a:gs pos="0">
+              <a:schemeClr val="phClr">
+                <a:satMod val="103000"/>
+                <a:lumMod val="102000"/>
+                <a:tint val="94000"/>
+              </a:schemeClr>
+            </a:gs>
+            <a:gs pos="50000">
+              <a:schemeClr val="phClr">
+                <a:satMod val="110000"/>
+                <a:lumMod val="100000"/>
+                <a:shade val="100000"/>
+              </a:schemeClr>
+            </a:gs>
+            <a:gs pos="100000">
+              <a:schemeClr val="phClr">
+                <a:lumMod val="99000"/>
+                <a:satMod val="120000"/>
+                <a:shade val="78000"/>
+              </a:schemeClr>
+            </a:gs>
+          </a:gsLst>
+          <a:lin ang="5400000" scaled="0"/>
+        </a:gradFill>
+      </a:fillStyleLst>
+      <a:lnStyleLst>
+        <a:ln w="12700" cap="flat" cmpd="sng" algn="ctr">
+          <a:solidFill>
+            <a:schemeClr val="phClr"/>
+          </a:solidFill>
+          <a:prstDash val="solid"/>
+          <a:miter lim="800000"/>
+        </a:ln>
+        <a:ln w="19050" cap="flat" cmpd="sng" algn="ctr">
+          <a:solidFill>
+            <a:schemeClr val="phClr"/>
+          </a:solidFill>
+          <a:prstDash val="solid"/>
+          <a:miter lim="800000"/>
+        </a:ln>
+        <a:ln w="25400" cap="flat" cmpd="sng" algn="ctr">
+          <a:solidFill>
+            <a:schemeClr val="phClr"/>
+          </a:solidFill>
+          <a:prstDash val="solid"/>
+          <a:miter lim="800000"/>
+        </a:ln>
+      </a:lnStyleLst>
+      <a:effectStyleLst>
+        <a:effectStyle>
+          <a:effectLst/>
+        </a:effectStyle>
+        <a:effectStyle>
+          <a:effectLst/>
+        </a:effectStyle>
+        <a:effectStyle>
+          <a:effectLst>
+            <a:outerShdw blurRad="57150" dist="19050" dir="5400000" algn="ctr" rotWithShape="0">
+              <a:srgbClr val="000000">
+                <a:alpha val="63000"/>
+              </a:srgbClr>
+            </a:outerShdw>
+          </a:effectLst>
+        </a:effectStyle>
+      </a:effectStyleLst>
+      <a:bgFillStyleLst>
+        <a:solidFill>
+          <a:schemeClr val="phClr"/>
+        </a:solidFill>
+        <a:solidFill>
+          <a:schemeClr val="phClr">
+            <a:tint val="95000"/>
+            <a:satMod val="170000"/>
+          </a:schemeClr>
+        </a:solidFill>
+        <a:gradFill rotWithShape="1">
+          <a:gsLst>
+            <a:gs pos="0">
+              <a:schemeClr val="phClr">
+                <a:tint val="93000"/>
+                <a:satMod val="150000"/>
+                <a:shade val="98000"/>
+                <a:lumMod val="102000"/>
+              </a:schemeClr>
+            </a:gs>
+            <a:gs pos="50000">
+              <a:schemeClr val="phClr">
+                <a:tint val="98000"/>
+                <a:satMod val="130000"/>
+                <a:shade val="90000"/>
+                <a:lumMod val="103000"/>
+              </a:schemeClr>
+            </a:gs>
+            <a:gs pos="100000">
+              <a:schemeClr val="phClr">
+                <a:shade val="63000"/>
+                <a:satMod val="120000"/>
+              </a:schemeClr>
+            </a:gs>
+          </a:gsLst>
+          <a:lin ang="5400000" scaled="0"/>
+        </a:gradFill>
+      </a:bgFillStyleLst>
+    </a:fmtScheme>
+  </a:themeElements>
+  <a:objectDefaults>
+    <a:lnDef>
+      <a:spPr/>
+      <a:bodyPr/>
+      <a:lstStyle/>
+      <a:style>
+        <a:lnRef idx="2">
+          <a:schemeClr val="accent1"/>
+        </a:lnRef>
+        <a:fillRef idx="0">
+          <a:schemeClr val="accent1"/>
+        </a:fillRef>
+        <a:effectRef idx="1">
+          <a:schemeClr val="accent1"/>
+        </a:effectRef>
+        <a:fontRef idx="minor">
+          <a:schemeClr val="tx1"/>
+        </a:fontRef>
+      </a:style>
+    </a:lnDef>
+  </a:objectDefaults>
+  <a:extraClrSchemeLst/>
+  <a:extLst>
+    <a:ext uri="{05A4C25C-085E-4340-85A3-A5531E510DB2}">
+      <thm15:themeFamily xmlns:thm15="http://schemas.microsoft.com/office/thememl/2012/main" name="Office Theme" id="{2E142A2C-CD16-42D6-873A-C26D2A0506FA}" vid="{1BDDFF52-6CD6-40A5-AB3C-68EB2F1E4D0A}"/>
+    </a:ext>
+  </a:extLst>
+</a:theme>
+</file>
+
+<file path=docMetadata/LabelInfo.xml><?xml version="1.0" encoding="utf-8"?>
+<clbl:labelList xmlns:clbl="http://schemas.microsoft.com/office/2020/mipLabelMetadata">
+  <clbl:label id="{ea60d57e-af5b-4752-ac57-3e4f28ca11dc}" enabled="1" method="Standard" siteId="{36da45f1-dd2c-4d1f-af13-5abe46b99921}" contentBits="0" removed="0"/>
+</clbl:labelList>
 </file>